--- a/nurse_nav_qa_story.pptx
+++ b/nurse_nav_qa_story.pptx
@@ -1736,7 +1736,7 @@
                 <a:ea typeface="Calibri" pitchFamily="34" charset="-122"/>
                 <a:cs typeface="Calibri" pitchFamily="34" charset="-120"/>
               </a:rPr>
-              <a:t>One in five callers had an ambulance sent even though triage did not call for one. These overrides are the single largest opportunity to change outcomes and cost.</a:t>
+              <a:t>One in five callers had an ambulance sent when triage did not indicate one. These are ambulance overrides.</a:t>
             </a:r>
             <a:endParaRPr lang="en-US" sz="1500" dirty="0"/>
           </a:p>
@@ -1760,7 +1760,7 @@
                 <a:ea typeface="Calibri" pitchFamily="34" charset="-122"/>
                 <a:cs typeface="Calibri" pitchFamily="34" charset="-120"/>
               </a:rPr>
-              <a:t>One in five calls were safely diverted away from the emergency department to self-care, urgent care, or virtual care. That volume is what a payer savings model draws on.</a:t>
+              <a:t>One in five calls were diverted from the emergency department to self-care, urgent care, or virtual care.</a:t>
             </a:r>
             <a:endParaRPr lang="en-US" sz="1500" dirty="0"/>
           </a:p>
@@ -1784,7 +1784,7 @@
                 <a:ea typeface="Calibri" pitchFamily="34" charset="-122"/>
                 <a:cs typeface="Calibri" pitchFamily="34" charset="-120"/>
               </a:rPr>
-              <a:t>Half of all calls fall into a catch-all category that today cannot be read for what it contains. Splitting it is the fastest way to unlock more insight.</a:t>
+              <a:t>Half of all calls fall into a single catch-all category that mixes multiple outcomes.</a:t>
             </a:r>
             <a:endParaRPr lang="en-US" sz="1500" dirty="0"/>
           </a:p>
@@ -1808,7 +1808,7 @@
                 <a:ea typeface="Calibri" pitchFamily="34" charset="-122"/>
                 <a:cs typeface="Calibri" pitchFamily="34" charset="-120"/>
               </a:rPr>
-              <a:t>The reasons behind the decisions live in nurses' free-text notes, which are complete enough to read at scale.</a:t>
+              <a:t>99.3% of nurse notes contain enough text to read at scale.</a:t>
             </a:r>
             <a:endParaRPr lang="en-US" sz="1500" dirty="0"/>
           </a:p>
@@ -1890,7 +1890,7 @@
                 <a:ea typeface="Calibri" pitchFamily="34" charset="-122"/>
                 <a:cs typeface="Calibri" pitchFamily="34" charset="-120"/>
               </a:rPr>
-              <a:t>The volume and the opportunity are clear. The next gains come from sharpening how calls are categorized, not from collecting more data.</a:t>
+              <a:t>150,003 calls analyzed. Override rate 20.5%, diversion rate 21%, uncategorized 53%.</a:t>
             </a:r>
             <a:endParaRPr lang="en-US" sz="1400" dirty="0"/>
           </a:p>
@@ -3354,7 +3354,7 @@
                 <a:ea typeface="Calibri" pitchFamily="34" charset="-122"/>
                 <a:cs typeface="Calibri" pitchFamily="34" charset="-120"/>
               </a:rPr>
-              <a:t>The override rate is the number to watch. It represents ambulances dispatched against a lower-acuity triage result.</a:t>
+              <a:t>An override is an ambulance dispatched against a lower-acuity triage result.</a:t>
             </a:r>
             <a:endParaRPr lang="en-US" sz="1400" dirty="0"/>
           </a:p>
@@ -3378,7 +3378,7 @@
                 <a:ea typeface="Calibri" pitchFamily="34" charset="-122"/>
                 <a:cs typeface="Calibri" pitchFamily="34" charset="-120"/>
               </a:rPr>
-              <a:t>Measured against ambulance volume specifically, overrides are 36% - more than a third of every ambulance sent.</a:t>
+              <a:t>Overrides are 20.5% of all calls and 36% of ambulance volume.</a:t>
             </a:r>
             <a:endParaRPr lang="en-US" sz="1400" dirty="0"/>
           </a:p>
@@ -3460,7 +3460,7 @@
                 <a:ea typeface="Calibri" pitchFamily="34" charset="-122"/>
                 <a:cs typeface="Calibri" pitchFamily="34" charset="-120"/>
               </a:rPr>
-              <a:t>Overrides are common and consequential. They are where clinical judgment, patient demand, and access barriers meet - and where routing can improve.</a:t>
+              <a:t>Ambulance overrides total 30,693 calls: 20.5% of all calls, 36% of ambulance volume.</a:t>
             </a:r>
             <a:endParaRPr lang="en-US" sz="1400" dirty="0"/>
           </a:p>
@@ -3524,7 +3524,7 @@
                 <a:ea typeface="Calibri" pitchFamily="34" charset="-122"/>
                 <a:cs typeface="Calibri" pitchFamily="34" charset="-120"/>
               </a:rPr>
-              <a:t>The override opportunity</a:t>
+              <a:t>What drives the overrides</a:t>
             </a:r>
             <a:endParaRPr lang="en-US" sz="2600" dirty="0"/>
           </a:p>
@@ -3563,7 +3563,7 @@
                 <a:ea typeface="Calibri" pitchFamily="34" charset="-122"/>
                 <a:cs typeface="Calibri" pitchFamily="34" charset="-120"/>
               </a:rPr>
-              <a:t>Top reasons a caller ended up with an ambulance despite a lower-acuity triage</a:t>
+              <a:t>Top chief complaints among the 30,693 override calls</a:t>
             </a:r>
             <a:endParaRPr lang="en-US" sz="1500" dirty="0"/>
           </a:p>
@@ -5422,7 +5422,7 @@
                 <a:ea typeface="Calibri" pitchFamily="34" charset="-122"/>
                 <a:cs typeface="Calibri" pitchFamily="34" charset="-120"/>
               </a:rPr>
-              <a:t>The top ten complaints account for roughly half of all overrides.</a:t>
+              <a:t>The top ten complaints account for 15,474 calls, roughly half of all overrides.</a:t>
             </a:r>
             <a:endParaRPr lang="en-US" sz="1400" dirty="0"/>
           </a:p>
@@ -5446,7 +5446,7 @@
                 <a:ea typeface="Calibri" pitchFamily="34" charset="-122"/>
                 <a:cs typeface="Calibri" pitchFamily="34" charset="-120"/>
               </a:rPr>
-              <a:t>Many are chronic or ambulatory conditions rather than time-critical emergencies.</a:t>
+              <a:t>Abdominal pain, leg pain, and catheter/nephrostomy are the three largest, totaling 7,067 calls.</a:t>
             </a:r>
             <a:endParaRPr lang="en-US" sz="1400" dirty="0"/>
           </a:p>
@@ -5470,31 +5470,7 @@
                 <a:ea typeface="Calibri" pitchFamily="34" charset="-122"/>
                 <a:cs typeface="Calibri" pitchFamily="34" charset="-120"/>
               </a:rPr>
-              <a:t>These are the presentations where a different front-end path - urgent care, telehealth, scheduled transport - could safely divert the call.</a:t>
-            </a:r>
-            <a:endParaRPr lang="en-US" sz="1400" dirty="0"/>
-          </a:p>
-          <a:p>
-            <a:pPr marL="342900" indent="-342900">
-              <a:lnSpc>
-                <a:spcPts val="2200"/>
-              </a:lnSpc>
-              <a:spcAft>
-                <a:spcPts val="1100"/>
-              </a:spcAft>
-              <a:buSzPct val="100000"/>
-              <a:buChar char="•"/>
-            </a:pPr>
-            <a:r>
-              <a:rPr lang="en-US" sz="1400" dirty="0">
-                <a:solidFill>
-                  <a:srgbClr val="000000"/>
-                </a:solidFill>
-                <a:latin typeface="Calibri" pitchFamily="34" charset="0"/>
-                <a:ea typeface="Calibri" pitchFamily="34" charset="-122"/>
-                <a:cs typeface="Calibri" pitchFamily="34" charset="-120"/>
-              </a:rPr>
-              <a:t>This pattern is the strongest, most actionable signal in the data.</a:t>
+              <a:t>BLSD and NTLSICK are non-specific codes covering 3,102 calls.</a:t>
             </a:r>
             <a:endParaRPr lang="en-US" sz="1400" dirty="0"/>
           </a:p>
@@ -5576,7 +5552,7 @@
                 <a:ea typeface="Calibri" pitchFamily="34" charset="-122"/>
                 <a:cs typeface="Calibri" pitchFamily="34" charset="-120"/>
               </a:rPr>
-              <a:t>A short list of everyday conditions drives most overrides. Screening for them at the first call is the clearest route to fewer avoidable ambulance trips.</a:t>
+              <a:t>Ten chief complaints account for roughly half of all override calls.</a:t>
             </a:r>
             <a:endParaRPr lang="en-US" sz="1400" dirty="0"/>
           </a:p>
@@ -5640,7 +5616,7 @@
                 <a:ea typeface="Calibri" pitchFamily="34" charset="-122"/>
                 <a:cs typeface="Calibri" pitchFamily="34" charset="-120"/>
               </a:rPr>
-              <a:t>Diversion is already avoiding ED visits</a:t>
+              <a:t>Diversion volume</a:t>
             </a:r>
             <a:endParaRPr lang="en-US" sz="2600" dirty="0"/>
           </a:p>
@@ -5679,7 +5655,7 @@
                 <a:ea typeface="Calibri" pitchFamily="34" charset="-122"/>
                 <a:cs typeface="Calibri" pitchFamily="34" charset="-120"/>
               </a:rPr>
-              <a:t>31,542 calls, 21% of all volume, were kept out of the emergency department</a:t>
+              <a:t>31,542 calls, 21% of all volume, were diverted from the emergency department</a:t>
             </a:r>
             <a:endParaRPr lang="en-US" sz="1500" dirty="0"/>
           </a:p>
@@ -6289,7 +6265,7 @@
                 <a:ea typeface="Calibri" pitchFamily="34" charset="-122"/>
                 <a:cs typeface="Calibri" pitchFamily="34" charset="-120"/>
               </a:rPr>
-              <a:t>Each of these calls is a potential emergency-department visit avoided.</a:t>
+              <a:t>Diverted calls break down as self-care 25,174, virtual care 5,782, urgent care 586.</a:t>
             </a:r>
             <a:endParaRPr lang="en-US" sz="1450" dirty="0"/>
           </a:p>
@@ -6313,7 +6289,7 @@
                 <a:ea typeface="Calibri" pitchFamily="34" charset="-122"/>
                 <a:cs typeface="Calibri" pitchFamily="34" charset="-120"/>
               </a:rPr>
-              <a:t>This is the volume a payer conversation is built on: fewer ED visits, lower total cost of care, and care delivered at the right level.</a:t>
+              <a:t>Each represents an emergency-department visit that did not occur.</a:t>
             </a:r>
             <a:endParaRPr lang="en-US" sz="1450" dirty="0"/>
           </a:p>
@@ -6337,31 +6313,7 @@
                 <a:ea typeface="Calibri" pitchFamily="34" charset="-122"/>
                 <a:cs typeface="Calibri" pitchFamily="34" charset="-120"/>
               </a:rPr>
-              <a:t>The exact dollar value depends on an avoided-cost figure per diverted visit, which finance and payer strategy still need to set.</a:t>
-            </a:r>
-            <a:endParaRPr lang="en-US" sz="1450" dirty="0"/>
-          </a:p>
-          <a:p>
-            <a:pPr marL="342900" indent="-342900">
-              <a:lnSpc>
-                <a:spcPts val="2200"/>
-              </a:lnSpc>
-              <a:spcAft>
-                <a:spcPts val="1100"/>
-              </a:spcAft>
-              <a:buSzPct val="100000"/>
-              <a:buChar char="•"/>
-            </a:pPr>
-            <a:r>
-              <a:rPr lang="en-US" sz="1450" dirty="0">
-                <a:solidFill>
-                  <a:srgbClr val="000000"/>
-                </a:solidFill>
-                <a:latin typeface="Calibri" pitchFamily="34" charset="0"/>
-                <a:ea typeface="Calibri" pitchFamily="34" charset="-122"/>
-                <a:cs typeface="Calibri" pitchFamily="34" charset="-120"/>
-              </a:rPr>
-              <a:t>There is room to grow this number by catching more low-acuity calls at the front door.</a:t>
+              <a:t>A dollar value requires an avoided-cost figure per diverted visit, set by finance and payer strategy.</a:t>
             </a:r>
             <a:endParaRPr lang="en-US" sz="1450" dirty="0"/>
           </a:p>
@@ -6443,7 +6395,7 @@
                 <a:ea typeface="Calibri" pitchFamily="34" charset="-122"/>
                 <a:cs typeface="Calibri" pitchFamily="34" charset="-120"/>
               </a:rPr>
-              <a:t>One in five calls is already being diverted. Attaching a validated cost-avoidance figure turns this volume into a dollar story for payers.</a:t>
+              <a:t>31,542 calls (21%) were diverted from the ED. A dollar value depends on an avoided-cost figure from finance.</a:t>
             </a:r>
             <a:endParaRPr lang="en-US" sz="1400" dirty="0"/>
           </a:p>
@@ -6507,7 +6459,7 @@
                 <a:ea typeface="Calibri" pitchFamily="34" charset="-122"/>
                 <a:cs typeface="Calibri" pitchFamily="34" charset="-120"/>
               </a:rPr>
-              <a:t>The blind spot: half the calls are uncategorized</a:t>
+              <a:t>Half the calls are uncategorized</a:t>
             </a:r>
             <a:endParaRPr lang="en-US" sz="2600" dirty="0"/>
           </a:p>
@@ -6592,7 +6544,7 @@
                 <a:ea typeface="Calibri" pitchFamily="34" charset="-122"/>
                 <a:cs typeface="Calibri" pitchFamily="34" charset="-120"/>
               </a:rPr>
-              <a:t>More than half of all calls are pooled into one undifferentiated category.</a:t>
+              <a:t>79,671 calls are pooled into one category.</a:t>
             </a:r>
             <a:endParaRPr lang="en-US" sz="1550" dirty="0"/>
           </a:p>
@@ -6616,7 +6568,7 @@
                 <a:ea typeface="Calibri" pitchFamily="34" charset="-122"/>
                 <a:cs typeface="Calibri" pitchFamily="34" charset="-120"/>
               </a:rPr>
-              <a:t>It mixes very different outcomes - emergency transports, ER referrals, and virtual care - under a single label.</a:t>
+              <a:t>The group mixes emergency transports, ER referrals, and virtual care under a single label.</a:t>
             </a:r>
             <a:endParaRPr lang="en-US" sz="1550" dirty="0"/>
           </a:p>
@@ -6640,7 +6592,7 @@
                 <a:ea typeface="Calibri" pitchFamily="34" charset="-122"/>
                 <a:cs typeface="Calibri" pitchFamily="34" charset="-120"/>
               </a:rPr>
-              <a:t>As long as they sit together, no clear question can be answered about this group: not diversion potential, not cost, not clinical pattern.</a:t>
+              <a:t>The largest single label inside it is BLS for NMTARA 0 at 38,343 calls, followed by NN ER at 18,428.</a:t>
             </a:r>
             <a:endParaRPr lang="en-US" sz="1550" dirty="0"/>
           </a:p>
@@ -6664,7 +6616,7 @@
                 <a:ea typeface="Calibri" pitchFamily="34" charset="-122"/>
                 <a:cs typeface="Calibri" pitchFamily="34" charset="-120"/>
               </a:rPr>
-              <a:t>Separating this group into its real outcomes is the highest-leverage next step. It converts half the dataset from unreadable to actionable.</a:t>
+              <a:t>Splitting the group into its component outcomes is required before it can be measured.</a:t>
             </a:r>
             <a:endParaRPr lang="en-US" sz="1550" dirty="0"/>
           </a:p>
@@ -6746,7 +6698,7 @@
                 <a:ea typeface="Calibri" pitchFamily="34" charset="-122"/>
                 <a:cs typeface="Calibri" pitchFamily="34" charset="-120"/>
               </a:rPr>
-              <a:t>The biggest untapped insight is not new data - it is resolving the half of existing calls that are not yet cleanly categorized.</a:t>
+              <a:t>53% of calls sit in one category and are not yet broken into component outcomes.</a:t>
             </a:r>
             <a:endParaRPr lang="en-US" sz="1400" dirty="0"/>
           </a:p>
@@ -7132,7 +7084,7 @@
                           <a:ea typeface="Calibri" pitchFamily="34" charset="-122"/>
                           <a:cs typeface="Calibri" pitchFamily="34" charset="-120"/>
                         </a:rPr>
-                        <a:t>Shifts the ambulance and diversion rates materially</a:t>
+                        <a:t>Changes the ambulance and diversion rates</a:t>
                       </a:r>
                       <a:endParaRPr lang="en-US" sz="1250" dirty="0">
                         <a:latin typeface="Calibri" charset="0"/>
@@ -7658,7 +7610,7 @@
                           <a:ea typeface="Calibri" pitchFamily="34" charset="-122"/>
                           <a:cs typeface="Calibri" pitchFamily="34" charset="-120"/>
                         </a:rPr>
-                        <a:t>Which conditions should trigger a front-end high-acuity screen?</a:t>
+                        <a:t>Which conditions define a front-end high-acuity screen?</a:t>
                       </a:r>
                       <a:endParaRPr lang="en-US" sz="1250" dirty="0">
                         <a:latin typeface="Calibri" charset="0"/>
@@ -7723,7 +7675,7 @@
                           <a:ea typeface="Calibri" pitchFamily="34" charset="-122"/>
                           <a:cs typeface="Calibri" pitchFamily="34" charset="-120"/>
                         </a:rPr>
-                        <a:t>Reduces avoidable overrides at the first call</a:t>
+                        <a:t>Determines override routing at first call</a:t>
                       </a:r>
                       <a:endParaRPr lang="en-US" sz="1250" dirty="0">
                         <a:latin typeface="Calibri" charset="0"/>
@@ -7917,7 +7869,7 @@
                 <a:ea typeface="Calibri" pitchFamily="34" charset="-122"/>
                 <a:cs typeface="Calibri" pitchFamily="34" charset="-120"/>
               </a:rPr>
-              <a:t>Four decisions convert this analysis into action. None require new data collection - they require agreement on definitions and a cost assumption.</a:t>
+              <a:t>Four decisions are open. None require new data - they require agreement on definitions and a cost figure.</a:t>
             </a:r>
             <a:endParaRPr lang="en-US" sz="1400" dirty="0"/>
           </a:p>
@@ -8027,7 +7979,7 @@
                 <a:ea typeface="Calibri" pitchFamily="34" charset="-122"/>
                 <a:cs typeface="Calibri" pitchFamily="34" charset="-120"/>
               </a:rPr>
-              <a:t>Stand up a front-end screen for the handful of conditions that drive most overrides, routing true emergencies straight to an ambulance and everything else to nurse navigation.</a:t>
+              <a:t>Build a front-end screen for the conditions that drive most overrides.</a:t>
             </a:r>
             <a:endParaRPr lang="en-US" sz="1500" dirty="0"/>
           </a:p>
@@ -8051,7 +8003,7 @@
                 <a:ea typeface="Calibri" pitchFamily="34" charset="-122"/>
                 <a:cs typeface="Calibri" pitchFamily="34" charset="-120"/>
               </a:rPr>
-              <a:t>Separate the catch-all group into its real outcomes so the full dataset becomes readable.</a:t>
+              <a:t>Separate the catch-all group into its component outcomes.</a:t>
             </a:r>
             <a:endParaRPr lang="en-US" sz="1500" dirty="0"/>
           </a:p>
@@ -8075,7 +8027,7 @@
                 <a:ea typeface="Calibri" pitchFamily="34" charset="-122"/>
                 <a:cs typeface="Calibri" pitchFamily="34" charset="-120"/>
               </a:rPr>
-              <a:t>Agree an avoided-cost figure per diverted ED visit and attach it to the 31,542 diverted calls to produce a payer-facing savings estimate.</a:t>
+              <a:t>Set an avoided-cost figure per diverted ED visit and apply it to the 31,542 diverted calls.</a:t>
             </a:r>
             <a:endParaRPr lang="en-US" sz="1500" dirty="0"/>
           </a:p>
@@ -8099,7 +8051,7 @@
                 <a:ea typeface="Calibri" pitchFamily="34" charset="-122"/>
                 <a:cs typeface="Calibri" pitchFamily="34" charset="-120"/>
               </a:rPr>
-              <a:t>Report overrides against ambulance volume, where they are 36%, so the size of the opportunity is clear.</a:t>
+              <a:t>Report overrides against ambulance volume (36%) as well as against all calls (20.5%).</a:t>
             </a:r>
             <a:endParaRPr lang="en-US" sz="1500" dirty="0"/>
           </a:p>
@@ -8123,7 +8075,7 @@
                 <a:ea typeface="Calibri" pitchFamily="34" charset="-122"/>
                 <a:cs typeface="Calibri" pitchFamily="34" charset="-120"/>
               </a:rPr>
-              <a:t>Prioritize the lowest-performing markets first, where the gap to best practice is widest.</a:t>
+              <a:t>Sequence markets by current diversion rate.</a:t>
             </a:r>
             <a:endParaRPr lang="en-US" sz="1500" dirty="0"/>
           </a:p>
@@ -8205,7 +8157,7 @@
                 <a:ea typeface="Calibri" pitchFamily="34" charset="-122"/>
                 <a:cs typeface="Calibri" pitchFamily="34" charset="-120"/>
               </a:rPr>
-              <a:t>The path is diversion up, avoidable overrides down, and a dollar value attached - starting with the conditions and markets that move the number most.</a:t>
+              <a:t>Five steps: front-end screen, split the catch-all group, set a cost figure, dual override reporting, sequence by market.</a:t>
             </a:r>
             <a:endParaRPr lang="en-US" sz="1400" dirty="0"/>
           </a:p>

--- a/nurse_nav_qa_story.pptx
+++ b/nurse_nav_qa_story.pptx
@@ -16,9 +16,11 @@
     <p:sldId id="264" r:id="rId10"/>
     <p:sldId id="265" r:id="rId11"/>
     <p:sldId id="266" r:id="rId12"/>
+    <p:sldId id="267" r:id="rId13"/>
+    <p:sldId id="268" r:id="rId14"/>
   </p:sldIdLst>
   <p:notesMasterIdLst>
-    <p:notesMasterId r:id="rId13"/>
+    <p:notesMasterId r:id="rId15"/>
   </p:notesMasterIdLst>
   <p:sldSz cx="12191695" cy="6858000"/>
   <p:notesSz cx="6858000" cy="12191695"/>
@@ -712,6 +714,182 @@
             <a:fld id="{F7021451-1387-4CA6-816F-3879F97B5CBC}" type="slidenum">
               <a:rPr lang="en-US"/>
               <a:t>11</a:t>
+            </a:fld>
+            <a:endParaRPr lang="en-US"/>
+          </a:p>
+        </p:txBody>
+      </p:sp>
+    </p:spTree>
+    <p:extLst>
+      <p:ext uri="{BB962C8B-B14F-4D97-AF65-F5344CB8AC3E}">
+        <p14:creationId xmlns:p14="http://schemas.microsoft.com/office/powerpoint/2010/main" val="1024086991"/>
+      </p:ext>
+    </p:extLst>
+  </p:cSld>
+  <p:clrMapOvr>
+    <a:masterClrMapping/>
+  </p:clrMapOvr>
+</p:notes>
+</file>
+
+<file path=ppt/notesSlides/notesSlide12.xml><?xml version="1.0" encoding="utf-8"?>
+<p:notes xmlns:a="http://schemas.openxmlformats.org/drawingml/2006/main" xmlns:r="http://schemas.openxmlformats.org/officeDocument/2006/relationships" xmlns:p="http://schemas.openxmlformats.org/presentationml/2006/main">
+  <p:cSld>
+    <p:spTree>
+      <p:nvGrpSpPr>
+        <p:cNvPr id="1" name=""/>
+        <p:cNvGrpSpPr/>
+        <p:nvPr/>
+      </p:nvGrpSpPr>
+      <p:grpSpPr>
+        <a:xfrm>
+          <a:off x="0" y="0"/>
+          <a:ext cx="0" cy="0"/>
+          <a:chOff x="0" y="0"/>
+          <a:chExt cx="0" cy="0"/>
+        </a:xfrm>
+      </p:grpSpPr>
+      <p:sp>
+        <p:nvSpPr>
+          <p:cNvPr id="2" name="Slide Image Placeholder 1"/>
+          <p:cNvSpPr>
+            <a:spLocks noGrp="1" noRot="1" noChangeAspect="1"/>
+          </p:cNvSpPr>
+          <p:nvPr>
+            <p:ph type="sldImg"/>
+          </p:nvPr>
+        </p:nvSpPr>
+        <p:spPr/>
+      </p:sp>
+      <p:sp>
+        <p:nvSpPr>
+          <p:cNvPr id="3" name="Notes Placeholder 2"/>
+          <p:cNvSpPr>
+            <a:spLocks noGrp="1"/>
+          </p:cNvSpPr>
+          <p:nvPr>
+            <p:ph type="body" idx="1"/>
+          </p:nvPr>
+        </p:nvSpPr>
+        <p:spPr/>
+        <p:txBody>
+          <a:bodyPr/>
+          <a:lstStyle/>
+          <a:p>
+            <a:r>
+              <a:rPr lang="en-US" dirty="0"/>
+              <a:t/>
+            </a:r>
+            <a:endParaRPr lang="en-US" dirty="0"/>
+          </a:p>
+        </p:txBody>
+      </p:sp>
+      <p:sp>
+        <p:nvSpPr>
+          <p:cNvPr id="4" name="Slide Number Placeholder 3"/>
+          <p:cNvSpPr>
+            <a:spLocks noGrp="1"/>
+          </p:cNvSpPr>
+          <p:nvPr>
+            <p:ph type="sldNum" sz="quarter" idx="10"/>
+          </p:nvPr>
+        </p:nvSpPr>
+        <p:spPr/>
+        <p:txBody>
+          <a:bodyPr/>
+          <a:lstStyle/>
+          <a:p>
+            <a:fld id="{F7021451-1387-4CA6-816F-3879F97B5CBC}" type="slidenum">
+              <a:rPr lang="en-US"/>
+              <a:t>12</a:t>
+            </a:fld>
+            <a:endParaRPr lang="en-US"/>
+          </a:p>
+        </p:txBody>
+      </p:sp>
+    </p:spTree>
+    <p:extLst>
+      <p:ext uri="{BB962C8B-B14F-4D97-AF65-F5344CB8AC3E}">
+        <p14:creationId xmlns:p14="http://schemas.microsoft.com/office/powerpoint/2010/main" val="1024086991"/>
+      </p:ext>
+    </p:extLst>
+  </p:cSld>
+  <p:clrMapOvr>
+    <a:masterClrMapping/>
+  </p:clrMapOvr>
+</p:notes>
+</file>
+
+<file path=ppt/notesSlides/notesSlide13.xml><?xml version="1.0" encoding="utf-8"?>
+<p:notes xmlns:a="http://schemas.openxmlformats.org/drawingml/2006/main" xmlns:r="http://schemas.openxmlformats.org/officeDocument/2006/relationships" xmlns:p="http://schemas.openxmlformats.org/presentationml/2006/main">
+  <p:cSld>
+    <p:spTree>
+      <p:nvGrpSpPr>
+        <p:cNvPr id="1" name=""/>
+        <p:cNvGrpSpPr/>
+        <p:nvPr/>
+      </p:nvGrpSpPr>
+      <p:grpSpPr>
+        <a:xfrm>
+          <a:off x="0" y="0"/>
+          <a:ext cx="0" cy="0"/>
+          <a:chOff x="0" y="0"/>
+          <a:chExt cx="0" cy="0"/>
+        </a:xfrm>
+      </p:grpSpPr>
+      <p:sp>
+        <p:nvSpPr>
+          <p:cNvPr id="2" name="Slide Image Placeholder 1"/>
+          <p:cNvSpPr>
+            <a:spLocks noGrp="1" noRot="1" noChangeAspect="1"/>
+          </p:cNvSpPr>
+          <p:nvPr>
+            <p:ph type="sldImg"/>
+          </p:nvPr>
+        </p:nvSpPr>
+        <p:spPr/>
+      </p:sp>
+      <p:sp>
+        <p:nvSpPr>
+          <p:cNvPr id="3" name="Notes Placeholder 2"/>
+          <p:cNvSpPr>
+            <a:spLocks noGrp="1"/>
+          </p:cNvSpPr>
+          <p:nvPr>
+            <p:ph type="body" idx="1"/>
+          </p:nvPr>
+        </p:nvSpPr>
+        <p:spPr/>
+        <p:txBody>
+          <a:bodyPr/>
+          <a:lstStyle/>
+          <a:p>
+            <a:r>
+              <a:rPr lang="en-US" dirty="0"/>
+              <a:t/>
+            </a:r>
+            <a:endParaRPr lang="en-US" dirty="0"/>
+          </a:p>
+        </p:txBody>
+      </p:sp>
+      <p:sp>
+        <p:nvSpPr>
+          <p:cNvPr id="4" name="Slide Number Placeholder 3"/>
+          <p:cNvSpPr>
+            <a:spLocks noGrp="1"/>
+          </p:cNvSpPr>
+          <p:nvPr>
+            <p:ph type="sldNum" sz="quarter" idx="10"/>
+          </p:nvPr>
+        </p:nvSpPr>
+        <p:spPr/>
+        <p:txBody>
+          <a:bodyPr/>
+          <a:lstStyle/>
+          <a:p>
+            <a:fld id="{F7021451-1387-4CA6-816F-3879F97B5CBC}" type="slidenum">
+              <a:rPr lang="en-US"/>
+              <a:t>13</a:t>
             </a:fld>
             <a:endParaRPr lang="en-US"/>
           </a:p>
@@ -1933,15 +2111,1761 @@
                 <a:ea typeface="Calibri" pitchFamily="34" charset="-122"/>
                 <a:cs typeface="Calibri" pitchFamily="34" charset="-120"/>
               </a:rPr>
-              <a:t>What needs a decision</a:t>
+              <a:t>Call drop and technical issues</a:t>
             </a:r>
             <a:endParaRPr lang="en-US" sz="2400" dirty="0"/>
+          </a:p>
+        </p:txBody>
+      </p:sp>
+      <p:sp>
+        <p:nvSpPr>
+          <p:cNvPr id="3" name="Text 1"/>
+          <p:cNvSpPr/>
+          <p:nvPr/>
+        </p:nvSpPr>
+        <p:spPr>
+          <a:xfrm>
+            <a:off x="457200" y="822960"/>
+            <a:ext cx="11247120" cy="320040"/>
+          </a:xfrm>
+          <a:prstGeom prst="rect">
+            <a:avLst/>
+          </a:prstGeom>
+          <a:noFill/>
+          <a:ln/>
+        </p:spPr>
+        <p:txBody>
+          <a:bodyPr wrap="square" rtlCol="0" anchor="ctr"/>
+          <a:lstStyle/>
+          <a:p>
+            <a:pPr indent="0" marL="0">
+              <a:buNone/>
+            </a:pPr>
+            <a:r>
+              <a:rPr lang="en-US" sz="1300" dirty="0">
+                <a:solidFill>
+                  <a:srgbClr val="595959"/>
+                </a:solidFill>
+                <a:latin typeface="Calibri" pitchFamily="34" charset="0"/>
+                <a:ea typeface="Calibri" pitchFamily="34" charset="-122"/>
+                <a:cs typeface="Calibri" pitchFamily="34" charset="-120"/>
+              </a:rPr>
+              <a:t>Within the 14,465 calls where triage did not complete</a:t>
+            </a:r>
+            <a:endParaRPr lang="en-US" sz="1300" dirty="0"/>
+          </a:p>
+        </p:txBody>
+      </p:sp>
+      <p:pic>
+        <p:nvPicPr>
+          <p:cNvPr id="4" name="Image 0" descr="/home/claude/charts/calldrop.png">    </p:cNvPr>
+          <p:cNvPicPr>
+            <a:picLocks noChangeAspect="1"/>
+          </p:cNvPicPr>
+          <p:nvPr/>
+        </p:nvPicPr>
+        <p:blipFill>
+          <a:blip r:embed="rId1"/>
+          <a:stretch>
+            <a:fillRect/>
+          </a:stretch>
+        </p:blipFill>
+        <p:spPr>
+          <a:xfrm>
+            <a:off x="411480" y="1234440"/>
+            <a:ext cx="6583680" cy="3566160"/>
+          </a:xfrm>
+          <a:prstGeom prst="rect">
+            <a:avLst/>
+          </a:prstGeom>
+        </p:spPr>
+      </p:pic>
+      <p:sp>
+        <p:nvSpPr>
+          <p:cNvPr id="5" name="Text 2"/>
+          <p:cNvSpPr/>
+          <p:nvPr/>
+        </p:nvSpPr>
+        <p:spPr>
+          <a:xfrm>
+            <a:off x="7223760" y="1371600"/>
+            <a:ext cx="4480560" cy="4572000"/>
+          </a:xfrm>
+          <a:prstGeom prst="rect">
+            <a:avLst/>
+          </a:prstGeom>
+          <a:noFill/>
+          <a:ln/>
+        </p:spPr>
+        <p:txBody>
+          <a:bodyPr wrap="square" rtlCol="0" anchor="t"/>
+          <a:lstStyle/>
+          <a:p>
+            <a:pPr indent="0" marL="0">
+              <a:lnSpc>
+                <a:spcPts val="1700"/>
+              </a:lnSpc>
+              <a:spcAft>
+                <a:spcPts val="800"/>
+              </a:spcAft>
+              <a:buNone/>
+            </a:pPr>
+            <a:r>
+              <a:rPr lang="en-US" sz="1200" b="1" dirty="0">
+                <a:solidFill>
+                  <a:srgbClr val="000000"/>
+                </a:solidFill>
+                <a:latin typeface="Calibri" pitchFamily="34" charset="0"/>
+                <a:ea typeface="Calibri" pitchFamily="34" charset="-122"/>
+                <a:cs typeface="Calibri" pitchFamily="34" charset="-120"/>
+              </a:rPr>
+              <a:t>Of the 14,465 calls where triage did not complete, 3,384 (23.4%) ended from a dropped call or a technical issue rather than a clinical reason. </a:t>
+            </a:r>
+            <a:pPr indent="0" marL="0">
+              <a:lnSpc>
+                <a:spcPts val="1700"/>
+              </a:lnSpc>
+              <a:spcAft>
+                <a:spcPts val="800"/>
+              </a:spcAft>
+              <a:buNone/>
+            </a:pPr>
+            <a:r>
+              <a:rPr lang="en-US" sz="1200" dirty="0">
+                <a:solidFill>
+                  <a:srgbClr val="000000"/>
+                </a:solidFill>
+                <a:latin typeface="Calibri" pitchFamily="34" charset="0"/>
+                <a:ea typeface="Calibri" pitchFamily="34" charset="-122"/>
+                <a:cs typeface="Calibri" pitchFamily="34" charset="-120"/>
+              </a:rPr>
+              <a:t>The volume concentrates in a small set of markets: Seattle WA (461), Wake County NC (455), Dekalb County GA (446), and Baltimore MD (364) lead.</a:t>
+            </a:r>
+            <a:endParaRPr lang="en-US" sz="1200" dirty="0"/>
+          </a:p>
+        </p:txBody>
+      </p:sp>
+      <p:sp>
+        <p:nvSpPr>
+          <p:cNvPr id="6" name="Text 3"/>
+          <p:cNvSpPr/>
+          <p:nvPr/>
+        </p:nvSpPr>
+        <p:spPr>
+          <a:xfrm>
+            <a:off x="7223760" y="3383280"/>
+            <a:ext cx="4480560" cy="4572000"/>
+          </a:xfrm>
+          <a:prstGeom prst="rect">
+            <a:avLst/>
+          </a:prstGeom>
+          <a:noFill/>
+          <a:ln/>
+        </p:spPr>
+        <p:txBody>
+          <a:bodyPr wrap="square" rtlCol="0" anchor="t"/>
+          <a:lstStyle/>
+          <a:p>
+            <a:pPr indent="0" marL="0">
+              <a:lnSpc>
+                <a:spcPts val="1700"/>
+              </a:lnSpc>
+              <a:spcAft>
+                <a:spcPts val="800"/>
+              </a:spcAft>
+              <a:buNone/>
+            </a:pPr>
+            <a:r>
+              <a:rPr lang="en-US" sz="1200" dirty="0">
+                <a:solidFill>
+                  <a:srgbClr val="000000"/>
+                </a:solidFill>
+                <a:latin typeface="Calibri" pitchFamily="34" charset="0"/>
+                <a:ea typeface="Calibri" pitchFamily="34" charset="-122"/>
+                <a:cs typeface="Calibri" pitchFamily="34" charset="-120"/>
+              </a:rPr>
+              <a:t>This is measured across every call from the note text, not a sample. </a:t>
+            </a:r>
+            <a:pPr indent="0" marL="0">
+              <a:lnSpc>
+                <a:spcPts val="1700"/>
+              </a:lnSpc>
+              <a:spcAft>
+                <a:spcPts val="800"/>
+              </a:spcAft>
+              <a:buNone/>
+            </a:pPr>
+            <a:r>
+              <a:rPr lang="en-US" sz="1200" dirty="0">
+                <a:solidFill>
+                  <a:srgbClr val="000000"/>
+                </a:solidFill>
+                <a:latin typeface="Calibri" pitchFamily="34" charset="0"/>
+                <a:ea typeface="Calibri" pitchFamily="34" charset="-122"/>
+                <a:cs typeface="Calibri" pitchFamily="34" charset="-120"/>
+              </a:rPr>
+              <a:t>It replaces the earlier sample-based 17% estimate; the two figures are different measurements and should be reconciled.</a:t>
+            </a:r>
+            <a:endParaRPr lang="en-US" sz="1200" dirty="0"/>
+          </a:p>
+        </p:txBody>
+      </p:sp>
+      <p:sp>
+        <p:nvSpPr>
+          <p:cNvPr id="7" name="Shape 4"/>
+          <p:cNvSpPr/>
+          <p:nvPr/>
+        </p:nvSpPr>
+        <p:spPr>
+          <a:xfrm>
+            <a:off x="457200" y="5779008"/>
+            <a:ext cx="11274552" cy="0"/>
+          </a:xfrm>
+          <a:prstGeom prst="line">
+            <a:avLst/>
+          </a:prstGeom>
+          <a:noFill/>
+          <a:ln w="9525">
+            <a:solidFill>
+              <a:srgbClr val="BFBFBF"/>
+            </a:solidFill>
+            <a:prstDash val="solid"/>
+          </a:ln>
+        </p:spPr>
+      </p:sp>
+      <p:sp>
+        <p:nvSpPr>
+          <p:cNvPr id="8" name="Text 5"/>
+          <p:cNvSpPr/>
+          <p:nvPr/>
+        </p:nvSpPr>
+        <p:spPr>
+          <a:xfrm>
+            <a:off x="457200" y="5907024"/>
+            <a:ext cx="11274552" cy="868680"/>
+          </a:xfrm>
+          <a:prstGeom prst="rect">
+            <a:avLst/>
+          </a:prstGeom>
+          <a:noFill/>
+          <a:ln/>
+        </p:spPr>
+        <p:txBody>
+          <a:bodyPr wrap="square" rtlCol="0" anchor="t"/>
+          <a:lstStyle/>
+          <a:p>
+            <a:pPr indent="0" marL="0">
+              <a:lnSpc>
+                <a:spcPts val="1300"/>
+              </a:lnSpc>
+              <a:buNone/>
+            </a:pPr>
+            <a:r>
+              <a:rPr lang="en-US" sz="1050" b="1" dirty="0">
+                <a:solidFill>
+                  <a:srgbClr val="000000"/>
+                </a:solidFill>
+                <a:latin typeface="Calibri" pitchFamily="34" charset="0"/>
+                <a:ea typeface="Calibri" pitchFamily="34" charset="-122"/>
+                <a:cs typeface="Calibri" pitchFamily="34" charset="-120"/>
+              </a:rPr>
+              <a:t>How this was derived:  </a:t>
+            </a:r>
+            <a:pPr indent="0" marL="0">
+              <a:lnSpc>
+                <a:spcPts val="1300"/>
+              </a:lnSpc>
+              <a:buNone/>
+            </a:pPr>
+            <a:r>
+              <a:rPr lang="en-US" sz="1050" dirty="0">
+                <a:solidFill>
+                  <a:srgbClr val="000000"/>
+                </a:solidFill>
+                <a:latin typeface="Calibri" pitchFamily="34" charset="0"/>
+                <a:ea typeface="Calibri" pitchFamily="34" charset="-122"/>
+                <a:cs typeface="Calibri" pitchFamily="34" charset="-120"/>
+              </a:rPr>
+              <a:t>Source: Nurses Notes on the 14,465 triage-not-completed calls (NMTARA 6 label). Each note scanned for disconnect and technical terms (dropped, disconnected, hung up, technical, lost call, no answer, could not reach). Full population, not a sample. Share = 3,384 / 14,465. Market split groups those flagged calls by Market Name.</a:t>
+            </a:r>
+            <a:endParaRPr lang="en-US" sz="1050" dirty="0"/>
+          </a:p>
+        </p:txBody>
+      </p:sp>
+    </p:spTree>
+  </p:cSld>
+  <p:clrMapOvr>
+    <a:masterClrMapping/>
+  </p:clrMapOvr>
+</p:sld>
+</file>
+
+<file path=ppt/slides/slide11.xml><?xml version="1.0" encoding="utf-8"?>
+<p:sld xmlns:a="http://schemas.openxmlformats.org/drawingml/2006/main" xmlns:r="http://schemas.openxmlformats.org/officeDocument/2006/relationships" xmlns:p="http://schemas.openxmlformats.org/presentationml/2006/main">
+  <p:cSld name="Slide 11">
+    <p:spTree>
+      <p:nvGrpSpPr>
+        <p:cNvPr id="1" name=""/>
+        <p:cNvGrpSpPr/>
+        <p:nvPr/>
+      </p:nvGrpSpPr>
+      <p:grpSpPr>
+        <a:xfrm>
+          <a:off x="0" y="0"/>
+          <a:ext cx="0" cy="0"/>
+          <a:chOff x="0" y="0"/>
+          <a:chExt cx="0" cy="0"/>
+        </a:xfrm>
+      </p:grpSpPr>
+      <p:sp>
+        <p:nvSpPr>
+          <p:cNvPr id="2" name="Text 0"/>
+          <p:cNvSpPr/>
+          <p:nvPr/>
+        </p:nvSpPr>
+        <p:spPr>
+          <a:xfrm>
+            <a:off x="457200" y="292608"/>
+            <a:ext cx="11247120" cy="502920"/>
+          </a:xfrm>
+          <a:prstGeom prst="rect">
+            <a:avLst/>
+          </a:prstGeom>
+          <a:noFill/>
+          <a:ln/>
+        </p:spPr>
+        <p:txBody>
+          <a:bodyPr wrap="square" rtlCol="0" anchor="ctr"/>
+          <a:lstStyle/>
+          <a:p>
+            <a:pPr indent="0" marL="0">
+              <a:buNone/>
+            </a:pPr>
+            <a:r>
+              <a:rPr lang="en-US" sz="2400" b="1" dirty="0">
+                <a:solidFill>
+                  <a:srgbClr val="000000"/>
+                </a:solidFill>
+                <a:latin typeface="Calibri" pitchFamily="34" charset="0"/>
+                <a:ea typeface="Calibri" pitchFamily="34" charset="-122"/>
+                <a:cs typeface="Calibri" pitchFamily="34" charset="-120"/>
+              </a:rPr>
+              <a:t>Half the calls are uncategorized</a:t>
+            </a:r>
+            <a:endParaRPr lang="en-US" sz="2400" dirty="0"/>
+          </a:p>
+        </p:txBody>
+      </p:sp>
+      <p:sp>
+        <p:nvSpPr>
+          <p:cNvPr id="3" name="Text 1"/>
+          <p:cNvSpPr/>
+          <p:nvPr/>
+        </p:nvSpPr>
+        <p:spPr>
+          <a:xfrm>
+            <a:off x="457200" y="822960"/>
+            <a:ext cx="11247120" cy="320040"/>
+          </a:xfrm>
+          <a:prstGeom prst="rect">
+            <a:avLst/>
+          </a:prstGeom>
+          <a:noFill/>
+          <a:ln/>
+        </p:spPr>
+        <p:txBody>
+          <a:bodyPr wrap="square" rtlCol="0" anchor="ctr"/>
+          <a:lstStyle/>
+          <a:p>
+            <a:pPr indent="0" marL="0">
+              <a:buNone/>
+            </a:pPr>
+            <a:r>
+              <a:rPr lang="en-US" sz="1300" dirty="0">
+                <a:solidFill>
+                  <a:srgbClr val="595959"/>
+                </a:solidFill>
+                <a:latin typeface="Calibri" pitchFamily="34" charset="0"/>
+                <a:ea typeface="Calibri" pitchFamily="34" charset="-122"/>
+                <a:cs typeface="Calibri" pitchFamily="34" charset="-120"/>
+              </a:rPr>
+              <a:t>79,671 calls, 53% of volume, in a single catch-all group</a:t>
+            </a:r>
+            <a:endParaRPr lang="en-US" sz="1300" dirty="0"/>
           </a:p>
         </p:txBody>
       </p:sp>
       <p:graphicFrame>
         <p:nvGraphicFramePr>
-          <p:cNvPr id="11" name="Table 0"/>
+          <p:cNvPr id="12" name="Table 0"/>
+          <p:cNvGraphicFramePr>
+            <a:graphicFrameLocks noGrp="1"/>
+          </p:cNvGraphicFramePr>
+          <p:nvPr>
+            <p:extLst>
+              <p:ext uri="{D42A27DB-BD31-4B8C-83A1-F6EECF244321}">
+                <p14:modId xmlns:p14="http://schemas.microsoft.com/office/powerpoint/2010/main" val="1579011935"/>
+              </p:ext>
+            </p:extLst>
+          </p:nvPr>
+        </p:nvGraphicFramePr>
+        <p:xfrm>
+          <a:off x="457200" y="1280160"/>
+          <a:ext cx="4572000" cy="914400"/>
+        </p:xfrm>
+        <a:graphic>
+          <a:graphicData uri="http://schemas.openxmlformats.org/drawingml/2006/table">
+            <a:tbl>
+              <a:tblPr/>
+              <a:tblGrid>
+                <a:gridCol w="3200400"/>
+                <a:gridCol w="1371600"/>
+              </a:tblGrid>
+              <a:tr h="310896">
+                <a:tc>
+                  <a:txBody>
+                    <a:bodyPr/>
+                    <a:lstStyle/>
+                    <a:p>
+                      <a:pPr indent="0" marL="0">
+                        <a:buNone/>
+                      </a:pPr>
+                      <a:r>
+                        <a:rPr lang="en-US" sz="1200" b="1" dirty="0">
+                          <a:solidFill>
+                            <a:srgbClr val="000000"/>
+                          </a:solidFill>
+                          <a:latin typeface="Calibri" pitchFamily="34" charset="0"/>
+                          <a:ea typeface="Calibri" pitchFamily="34" charset="-122"/>
+                          <a:cs typeface="Calibri" pitchFamily="34" charset="-120"/>
+                        </a:rPr>
+                        <a:t>Label inside the group</a:t>
+                      </a:r>
+                      <a:endParaRPr lang="en-US" sz="1200" dirty="0">
+                        <a:latin typeface="Calibri" charset="0"/>
+                        <a:ea typeface="Calibri" charset="0"/>
+                        <a:cs typeface="Calibri" charset="0"/>
+                      </a:endParaRPr>
+                    </a:p>
+                  </a:txBody>
+                  <a:tcPr marL="91440" marR="91440" marT="45720" marB="45720" anchor="ctr">
+                    <a:lnL w="6350" cap="flat" cmpd="sng" algn="ctr">
+                      <a:solidFill>
+                        <a:srgbClr val="BFBFBF"/>
+                      </a:solidFill>
+                      <a:prstDash val="solid"/>
+                      <a:round/>
+                      <a:headEnd type="none" w="med" len="med"/>
+                      <a:tailEnd type="none" w="med" len="med"/>
+                    </a:lnL>
+                    <a:lnR w="6350" cap="flat" cmpd="sng" algn="ctr">
+                      <a:solidFill>
+                        <a:srgbClr val="BFBFBF"/>
+                      </a:solidFill>
+                      <a:prstDash val="solid"/>
+                      <a:round/>
+                      <a:headEnd type="none" w="med" len="med"/>
+                      <a:tailEnd type="none" w="med" len="med"/>
+                    </a:lnR>
+                    <a:lnT w="6350" cap="flat" cmpd="sng" algn="ctr">
+                      <a:solidFill>
+                        <a:srgbClr val="BFBFBF"/>
+                      </a:solidFill>
+                      <a:prstDash val="solid"/>
+                      <a:round/>
+                      <a:headEnd type="none" w="med" len="med"/>
+                      <a:tailEnd type="none" w="med" len="med"/>
+                    </a:lnT>
+                    <a:lnB w="6350" cap="flat" cmpd="sng" algn="ctr">
+                      <a:solidFill>
+                        <a:srgbClr val="BFBFBF"/>
+                      </a:solidFill>
+                      <a:prstDash val="solid"/>
+                      <a:round/>
+                      <a:headEnd type="none" w="med" len="med"/>
+                      <a:tailEnd type="none" w="med" len="med"/>
+                    </a:lnB>
+                    <a:solidFill>
+                      <a:srgbClr val="F2F2F2"/>
+                    </a:solidFill>
+                  </a:tcPr>
+                </a:tc>
+                <a:tc>
+                  <a:txBody>
+                    <a:bodyPr/>
+                    <a:lstStyle/>
+                    <a:p>
+                      <a:pPr indent="0" marL="0">
+                        <a:buNone/>
+                      </a:pPr>
+                      <a:r>
+                        <a:rPr lang="en-US" sz="1200" b="1" dirty="0">
+                          <a:solidFill>
+                            <a:srgbClr val="000000"/>
+                          </a:solidFill>
+                          <a:latin typeface="Calibri" pitchFamily="34" charset="0"/>
+                          <a:ea typeface="Calibri" pitchFamily="34" charset="-122"/>
+                          <a:cs typeface="Calibri" pitchFamily="34" charset="-120"/>
+                        </a:rPr>
+                        <a:t>Calls</a:t>
+                      </a:r>
+                      <a:endParaRPr lang="en-US" sz="1200" dirty="0">
+                        <a:latin typeface="Calibri" charset="0"/>
+                        <a:ea typeface="Calibri" charset="0"/>
+                        <a:cs typeface="Calibri" charset="0"/>
+                      </a:endParaRPr>
+                    </a:p>
+                  </a:txBody>
+                  <a:tcPr marL="91440" marR="91440" marT="45720" marB="45720" anchor="ctr">
+                    <a:lnL w="6350" cap="flat" cmpd="sng" algn="ctr">
+                      <a:solidFill>
+                        <a:srgbClr val="BFBFBF"/>
+                      </a:solidFill>
+                      <a:prstDash val="solid"/>
+                      <a:round/>
+                      <a:headEnd type="none" w="med" len="med"/>
+                      <a:tailEnd type="none" w="med" len="med"/>
+                    </a:lnL>
+                    <a:lnR w="6350" cap="flat" cmpd="sng" algn="ctr">
+                      <a:solidFill>
+                        <a:srgbClr val="BFBFBF"/>
+                      </a:solidFill>
+                      <a:prstDash val="solid"/>
+                      <a:round/>
+                      <a:headEnd type="none" w="med" len="med"/>
+                      <a:tailEnd type="none" w="med" len="med"/>
+                    </a:lnR>
+                    <a:lnT w="6350" cap="flat" cmpd="sng" algn="ctr">
+                      <a:solidFill>
+                        <a:srgbClr val="BFBFBF"/>
+                      </a:solidFill>
+                      <a:prstDash val="solid"/>
+                      <a:round/>
+                      <a:headEnd type="none" w="med" len="med"/>
+                      <a:tailEnd type="none" w="med" len="med"/>
+                    </a:lnT>
+                    <a:lnB w="6350" cap="flat" cmpd="sng" algn="ctr">
+                      <a:solidFill>
+                        <a:srgbClr val="BFBFBF"/>
+                      </a:solidFill>
+                      <a:prstDash val="solid"/>
+                      <a:round/>
+                      <a:headEnd type="none" w="med" len="med"/>
+                      <a:tailEnd type="none" w="med" len="med"/>
+                    </a:lnB>
+                    <a:solidFill>
+                      <a:srgbClr val="F2F2F2"/>
+                    </a:solidFill>
+                  </a:tcPr>
+                </a:tc>
+              </a:tr>
+              <a:tr h="310896">
+                <a:tc>
+                  <a:txBody>
+                    <a:bodyPr/>
+                    <a:lstStyle/>
+                    <a:p>
+                      <a:pPr algn="l" indent="0" marL="0">
+                        <a:buNone/>
+                      </a:pPr>
+                      <a:r>
+                        <a:rPr lang="en-US" sz="1150" dirty="0">
+                          <a:solidFill>
+                            <a:srgbClr val="000000"/>
+                          </a:solidFill>
+                          <a:latin typeface="Calibri" pitchFamily="34" charset="0"/>
+                          <a:ea typeface="Calibri" pitchFamily="34" charset="-122"/>
+                          <a:cs typeface="Calibri" pitchFamily="34" charset="-120"/>
+                        </a:rPr>
+                        <a:t>BLS for NMTARA 0</a:t>
+                      </a:r>
+                      <a:endParaRPr lang="en-US" sz="1150" dirty="0">
+                        <a:latin typeface="Calibri" charset="0"/>
+                        <a:ea typeface="Calibri" charset="0"/>
+                        <a:cs typeface="Calibri" charset="0"/>
+                      </a:endParaRPr>
+                    </a:p>
+                  </a:txBody>
+                  <a:tcPr marL="91440" marR="91440" marT="45720" marB="45720" anchor="ctr">
+                    <a:lnL w="6350" cap="flat" cmpd="sng" algn="ctr">
+                      <a:solidFill>
+                        <a:srgbClr val="BFBFBF"/>
+                      </a:solidFill>
+                      <a:prstDash val="solid"/>
+                      <a:round/>
+                      <a:headEnd type="none" w="med" len="med"/>
+                      <a:tailEnd type="none" w="med" len="med"/>
+                    </a:lnL>
+                    <a:lnR w="6350" cap="flat" cmpd="sng" algn="ctr">
+                      <a:solidFill>
+                        <a:srgbClr val="BFBFBF"/>
+                      </a:solidFill>
+                      <a:prstDash val="solid"/>
+                      <a:round/>
+                      <a:headEnd type="none" w="med" len="med"/>
+                      <a:tailEnd type="none" w="med" len="med"/>
+                    </a:lnR>
+                    <a:lnT w="6350" cap="flat" cmpd="sng" algn="ctr">
+                      <a:solidFill>
+                        <a:srgbClr val="BFBFBF"/>
+                      </a:solidFill>
+                      <a:prstDash val="solid"/>
+                      <a:round/>
+                      <a:headEnd type="none" w="med" len="med"/>
+                      <a:tailEnd type="none" w="med" len="med"/>
+                    </a:lnT>
+                    <a:lnB w="6350" cap="flat" cmpd="sng" algn="ctr">
+                      <a:solidFill>
+                        <a:srgbClr val="BFBFBF"/>
+                      </a:solidFill>
+                      <a:prstDash val="solid"/>
+                      <a:round/>
+                      <a:headEnd type="none" w="med" len="med"/>
+                      <a:tailEnd type="none" w="med" len="med"/>
+                    </a:lnB>
+                  </a:tcPr>
+                </a:tc>
+                <a:tc>
+                  <a:txBody>
+                    <a:bodyPr/>
+                    <a:lstStyle/>
+                    <a:p>
+                      <a:pPr algn="ctr" indent="0" marL="0">
+                        <a:buNone/>
+                      </a:pPr>
+                      <a:r>
+                        <a:rPr lang="en-US" sz="1150" dirty="0">
+                          <a:solidFill>
+                            <a:srgbClr val="000000"/>
+                          </a:solidFill>
+                          <a:latin typeface="Calibri" pitchFamily="34" charset="0"/>
+                          <a:ea typeface="Calibri" pitchFamily="34" charset="-122"/>
+                          <a:cs typeface="Calibri" pitchFamily="34" charset="-120"/>
+                        </a:rPr>
+                        <a:t>38,343</a:t>
+                      </a:r>
+                      <a:endParaRPr lang="en-US" sz="1150" dirty="0">
+                        <a:latin typeface="Calibri" charset="0"/>
+                        <a:ea typeface="Calibri" charset="0"/>
+                        <a:cs typeface="Calibri" charset="0"/>
+                      </a:endParaRPr>
+                    </a:p>
+                  </a:txBody>
+                  <a:tcPr marL="91440" marR="91440" marT="45720" marB="45720" anchor="ctr">
+                    <a:lnL w="6350" cap="flat" cmpd="sng" algn="ctr">
+                      <a:solidFill>
+                        <a:srgbClr val="BFBFBF"/>
+                      </a:solidFill>
+                      <a:prstDash val="solid"/>
+                      <a:round/>
+                      <a:headEnd type="none" w="med" len="med"/>
+                      <a:tailEnd type="none" w="med" len="med"/>
+                    </a:lnL>
+                    <a:lnR w="6350" cap="flat" cmpd="sng" algn="ctr">
+                      <a:solidFill>
+                        <a:srgbClr val="BFBFBF"/>
+                      </a:solidFill>
+                      <a:prstDash val="solid"/>
+                      <a:round/>
+                      <a:headEnd type="none" w="med" len="med"/>
+                      <a:tailEnd type="none" w="med" len="med"/>
+                    </a:lnR>
+                    <a:lnT w="6350" cap="flat" cmpd="sng" algn="ctr">
+                      <a:solidFill>
+                        <a:srgbClr val="BFBFBF"/>
+                      </a:solidFill>
+                      <a:prstDash val="solid"/>
+                      <a:round/>
+                      <a:headEnd type="none" w="med" len="med"/>
+                      <a:tailEnd type="none" w="med" len="med"/>
+                    </a:lnT>
+                    <a:lnB w="6350" cap="flat" cmpd="sng" algn="ctr">
+                      <a:solidFill>
+                        <a:srgbClr val="BFBFBF"/>
+                      </a:solidFill>
+                      <a:prstDash val="solid"/>
+                      <a:round/>
+                      <a:headEnd type="none" w="med" len="med"/>
+                      <a:tailEnd type="none" w="med" len="med"/>
+                    </a:lnB>
+                  </a:tcPr>
+                </a:tc>
+              </a:tr>
+              <a:tr h="310896">
+                <a:tc>
+                  <a:txBody>
+                    <a:bodyPr/>
+                    <a:lstStyle/>
+                    <a:p>
+                      <a:pPr algn="l" indent="0" marL="0">
+                        <a:buNone/>
+                      </a:pPr>
+                      <a:r>
+                        <a:rPr lang="en-US" sz="1150" dirty="0">
+                          <a:solidFill>
+                            <a:srgbClr val="000000"/>
+                          </a:solidFill>
+                          <a:latin typeface="Calibri" pitchFamily="34" charset="0"/>
+                          <a:ea typeface="Calibri" pitchFamily="34" charset="-122"/>
+                          <a:cs typeface="Calibri" pitchFamily="34" charset="-120"/>
+                        </a:rPr>
+                        <a:t>NN ER</a:t>
+                      </a:r>
+                      <a:endParaRPr lang="en-US" sz="1150" dirty="0">
+                        <a:latin typeface="Calibri" charset="0"/>
+                        <a:ea typeface="Calibri" charset="0"/>
+                        <a:cs typeface="Calibri" charset="0"/>
+                      </a:endParaRPr>
+                    </a:p>
+                  </a:txBody>
+                  <a:tcPr marL="91440" marR="91440" marT="45720" marB="45720" anchor="ctr">
+                    <a:lnL w="6350" cap="flat" cmpd="sng" algn="ctr">
+                      <a:solidFill>
+                        <a:srgbClr val="BFBFBF"/>
+                      </a:solidFill>
+                      <a:prstDash val="solid"/>
+                      <a:round/>
+                      <a:headEnd type="none" w="med" len="med"/>
+                      <a:tailEnd type="none" w="med" len="med"/>
+                    </a:lnL>
+                    <a:lnR w="6350" cap="flat" cmpd="sng" algn="ctr">
+                      <a:solidFill>
+                        <a:srgbClr val="BFBFBF"/>
+                      </a:solidFill>
+                      <a:prstDash val="solid"/>
+                      <a:round/>
+                      <a:headEnd type="none" w="med" len="med"/>
+                      <a:tailEnd type="none" w="med" len="med"/>
+                    </a:lnR>
+                    <a:lnT w="6350" cap="flat" cmpd="sng" algn="ctr">
+                      <a:solidFill>
+                        <a:srgbClr val="BFBFBF"/>
+                      </a:solidFill>
+                      <a:prstDash val="solid"/>
+                      <a:round/>
+                      <a:headEnd type="none" w="med" len="med"/>
+                      <a:tailEnd type="none" w="med" len="med"/>
+                    </a:lnT>
+                    <a:lnB w="6350" cap="flat" cmpd="sng" algn="ctr">
+                      <a:solidFill>
+                        <a:srgbClr val="BFBFBF"/>
+                      </a:solidFill>
+                      <a:prstDash val="solid"/>
+                      <a:round/>
+                      <a:headEnd type="none" w="med" len="med"/>
+                      <a:tailEnd type="none" w="med" len="med"/>
+                    </a:lnB>
+                  </a:tcPr>
+                </a:tc>
+                <a:tc>
+                  <a:txBody>
+                    <a:bodyPr/>
+                    <a:lstStyle/>
+                    <a:p>
+                      <a:pPr algn="ctr" indent="0" marL="0">
+                        <a:buNone/>
+                      </a:pPr>
+                      <a:r>
+                        <a:rPr lang="en-US" sz="1150" dirty="0">
+                          <a:solidFill>
+                            <a:srgbClr val="000000"/>
+                          </a:solidFill>
+                          <a:latin typeface="Calibri" pitchFamily="34" charset="0"/>
+                          <a:ea typeface="Calibri" pitchFamily="34" charset="-122"/>
+                          <a:cs typeface="Calibri" pitchFamily="34" charset="-120"/>
+                        </a:rPr>
+                        <a:t>18,428</a:t>
+                      </a:r>
+                      <a:endParaRPr lang="en-US" sz="1150" dirty="0">
+                        <a:latin typeface="Calibri" charset="0"/>
+                        <a:ea typeface="Calibri" charset="0"/>
+                        <a:cs typeface="Calibri" charset="0"/>
+                      </a:endParaRPr>
+                    </a:p>
+                  </a:txBody>
+                  <a:tcPr marL="91440" marR="91440" marT="45720" marB="45720" anchor="ctr">
+                    <a:lnL w="6350" cap="flat" cmpd="sng" algn="ctr">
+                      <a:solidFill>
+                        <a:srgbClr val="BFBFBF"/>
+                      </a:solidFill>
+                      <a:prstDash val="solid"/>
+                      <a:round/>
+                      <a:headEnd type="none" w="med" len="med"/>
+                      <a:tailEnd type="none" w="med" len="med"/>
+                    </a:lnL>
+                    <a:lnR w="6350" cap="flat" cmpd="sng" algn="ctr">
+                      <a:solidFill>
+                        <a:srgbClr val="BFBFBF"/>
+                      </a:solidFill>
+                      <a:prstDash val="solid"/>
+                      <a:round/>
+                      <a:headEnd type="none" w="med" len="med"/>
+                      <a:tailEnd type="none" w="med" len="med"/>
+                    </a:lnR>
+                    <a:lnT w="6350" cap="flat" cmpd="sng" algn="ctr">
+                      <a:solidFill>
+                        <a:srgbClr val="BFBFBF"/>
+                      </a:solidFill>
+                      <a:prstDash val="solid"/>
+                      <a:round/>
+                      <a:headEnd type="none" w="med" len="med"/>
+                      <a:tailEnd type="none" w="med" len="med"/>
+                    </a:lnT>
+                    <a:lnB w="6350" cap="flat" cmpd="sng" algn="ctr">
+                      <a:solidFill>
+                        <a:srgbClr val="BFBFBF"/>
+                      </a:solidFill>
+                      <a:prstDash val="solid"/>
+                      <a:round/>
+                      <a:headEnd type="none" w="med" len="med"/>
+                      <a:tailEnd type="none" w="med" len="med"/>
+                    </a:lnB>
+                  </a:tcPr>
+                </a:tc>
+              </a:tr>
+              <a:tr h="310896">
+                <a:tc>
+                  <a:txBody>
+                    <a:bodyPr/>
+                    <a:lstStyle/>
+                    <a:p>
+                      <a:pPr algn="l" indent="0" marL="0">
+                        <a:buNone/>
+                      </a:pPr>
+                      <a:r>
+                        <a:rPr lang="en-US" sz="1150" dirty="0">
+                          <a:solidFill>
+                            <a:srgbClr val="000000"/>
+                          </a:solidFill>
+                          <a:latin typeface="Calibri" pitchFamily="34" charset="0"/>
+                          <a:ea typeface="Calibri" pitchFamily="34" charset="-122"/>
+                          <a:cs typeface="Calibri" pitchFamily="34" charset="-120"/>
+                        </a:rPr>
+                        <a:t>REF CCR</a:t>
+                      </a:r>
+                      <a:endParaRPr lang="en-US" sz="1150" dirty="0">
+                        <a:latin typeface="Calibri" charset="0"/>
+                        <a:ea typeface="Calibri" charset="0"/>
+                        <a:cs typeface="Calibri" charset="0"/>
+                      </a:endParaRPr>
+                    </a:p>
+                  </a:txBody>
+                  <a:tcPr marL="91440" marR="91440" marT="45720" marB="45720" anchor="ctr">
+                    <a:lnL w="6350" cap="flat" cmpd="sng" algn="ctr">
+                      <a:solidFill>
+                        <a:srgbClr val="BFBFBF"/>
+                      </a:solidFill>
+                      <a:prstDash val="solid"/>
+                      <a:round/>
+                      <a:headEnd type="none" w="med" len="med"/>
+                      <a:tailEnd type="none" w="med" len="med"/>
+                    </a:lnL>
+                    <a:lnR w="6350" cap="flat" cmpd="sng" algn="ctr">
+                      <a:solidFill>
+                        <a:srgbClr val="BFBFBF"/>
+                      </a:solidFill>
+                      <a:prstDash val="solid"/>
+                      <a:round/>
+                      <a:headEnd type="none" w="med" len="med"/>
+                      <a:tailEnd type="none" w="med" len="med"/>
+                    </a:lnR>
+                    <a:lnT w="6350" cap="flat" cmpd="sng" algn="ctr">
+                      <a:solidFill>
+                        <a:srgbClr val="BFBFBF"/>
+                      </a:solidFill>
+                      <a:prstDash val="solid"/>
+                      <a:round/>
+                      <a:headEnd type="none" w="med" len="med"/>
+                      <a:tailEnd type="none" w="med" len="med"/>
+                    </a:lnT>
+                    <a:lnB w="6350" cap="flat" cmpd="sng" algn="ctr">
+                      <a:solidFill>
+                        <a:srgbClr val="BFBFBF"/>
+                      </a:solidFill>
+                      <a:prstDash val="solid"/>
+                      <a:round/>
+                      <a:headEnd type="none" w="med" len="med"/>
+                      <a:tailEnd type="none" w="med" len="med"/>
+                    </a:lnB>
+                  </a:tcPr>
+                </a:tc>
+                <a:tc>
+                  <a:txBody>
+                    <a:bodyPr/>
+                    <a:lstStyle/>
+                    <a:p>
+                      <a:pPr algn="ctr" indent="0" marL="0">
+                        <a:buNone/>
+                      </a:pPr>
+                      <a:r>
+                        <a:rPr lang="en-US" sz="1150" dirty="0">
+                          <a:solidFill>
+                            <a:srgbClr val="000000"/>
+                          </a:solidFill>
+                          <a:latin typeface="Calibri" pitchFamily="34" charset="0"/>
+                          <a:ea typeface="Calibri" pitchFamily="34" charset="-122"/>
+                          <a:cs typeface="Calibri" pitchFamily="34" charset="-120"/>
+                        </a:rPr>
+                        <a:t>7,855</a:t>
+                      </a:r>
+                      <a:endParaRPr lang="en-US" sz="1150" dirty="0">
+                        <a:latin typeface="Calibri" charset="0"/>
+                        <a:ea typeface="Calibri" charset="0"/>
+                        <a:cs typeface="Calibri" charset="0"/>
+                      </a:endParaRPr>
+                    </a:p>
+                  </a:txBody>
+                  <a:tcPr marL="91440" marR="91440" marT="45720" marB="45720" anchor="ctr">
+                    <a:lnL w="6350" cap="flat" cmpd="sng" algn="ctr">
+                      <a:solidFill>
+                        <a:srgbClr val="BFBFBF"/>
+                      </a:solidFill>
+                      <a:prstDash val="solid"/>
+                      <a:round/>
+                      <a:headEnd type="none" w="med" len="med"/>
+                      <a:tailEnd type="none" w="med" len="med"/>
+                    </a:lnL>
+                    <a:lnR w="6350" cap="flat" cmpd="sng" algn="ctr">
+                      <a:solidFill>
+                        <a:srgbClr val="BFBFBF"/>
+                      </a:solidFill>
+                      <a:prstDash val="solid"/>
+                      <a:round/>
+                      <a:headEnd type="none" w="med" len="med"/>
+                      <a:tailEnd type="none" w="med" len="med"/>
+                    </a:lnR>
+                    <a:lnT w="6350" cap="flat" cmpd="sng" algn="ctr">
+                      <a:solidFill>
+                        <a:srgbClr val="BFBFBF"/>
+                      </a:solidFill>
+                      <a:prstDash val="solid"/>
+                      <a:round/>
+                      <a:headEnd type="none" w="med" len="med"/>
+                      <a:tailEnd type="none" w="med" len="med"/>
+                    </a:lnT>
+                    <a:lnB w="6350" cap="flat" cmpd="sng" algn="ctr">
+                      <a:solidFill>
+                        <a:srgbClr val="BFBFBF"/>
+                      </a:solidFill>
+                      <a:prstDash val="solid"/>
+                      <a:round/>
+                      <a:headEnd type="none" w="med" len="med"/>
+                      <a:tailEnd type="none" w="med" len="med"/>
+                    </a:lnB>
+                  </a:tcPr>
+                </a:tc>
+              </a:tr>
+              <a:tr h="310896">
+                <a:tc>
+                  <a:txBody>
+                    <a:bodyPr/>
+                    <a:lstStyle/>
+                    <a:p>
+                      <a:pPr algn="l" indent="0" marL="0">
+                        <a:buNone/>
+                      </a:pPr>
+                      <a:r>
+                        <a:rPr lang="en-US" sz="1150" dirty="0">
+                          <a:solidFill>
+                            <a:srgbClr val="000000"/>
+                          </a:solidFill>
+                          <a:latin typeface="Calibri" pitchFamily="34" charset="0"/>
+                          <a:ea typeface="Calibri" pitchFamily="34" charset="-122"/>
+                          <a:cs typeface="Calibri" pitchFamily="34" charset="-120"/>
+                        </a:rPr>
+                        <a:t>VIRTUAL CARE</a:t>
+                      </a:r>
+                      <a:endParaRPr lang="en-US" sz="1150" dirty="0">
+                        <a:latin typeface="Calibri" charset="0"/>
+                        <a:ea typeface="Calibri" charset="0"/>
+                        <a:cs typeface="Calibri" charset="0"/>
+                      </a:endParaRPr>
+                    </a:p>
+                  </a:txBody>
+                  <a:tcPr marL="91440" marR="91440" marT="45720" marB="45720" anchor="ctr">
+                    <a:lnL w="6350" cap="flat" cmpd="sng" algn="ctr">
+                      <a:solidFill>
+                        <a:srgbClr val="BFBFBF"/>
+                      </a:solidFill>
+                      <a:prstDash val="solid"/>
+                      <a:round/>
+                      <a:headEnd type="none" w="med" len="med"/>
+                      <a:tailEnd type="none" w="med" len="med"/>
+                    </a:lnL>
+                    <a:lnR w="6350" cap="flat" cmpd="sng" algn="ctr">
+                      <a:solidFill>
+                        <a:srgbClr val="BFBFBF"/>
+                      </a:solidFill>
+                      <a:prstDash val="solid"/>
+                      <a:round/>
+                      <a:headEnd type="none" w="med" len="med"/>
+                      <a:tailEnd type="none" w="med" len="med"/>
+                    </a:lnR>
+                    <a:lnT w="6350" cap="flat" cmpd="sng" algn="ctr">
+                      <a:solidFill>
+                        <a:srgbClr val="BFBFBF"/>
+                      </a:solidFill>
+                      <a:prstDash val="solid"/>
+                      <a:round/>
+                      <a:headEnd type="none" w="med" len="med"/>
+                      <a:tailEnd type="none" w="med" len="med"/>
+                    </a:lnT>
+                    <a:lnB w="6350" cap="flat" cmpd="sng" algn="ctr">
+                      <a:solidFill>
+                        <a:srgbClr val="BFBFBF"/>
+                      </a:solidFill>
+                      <a:prstDash val="solid"/>
+                      <a:round/>
+                      <a:headEnd type="none" w="med" len="med"/>
+                      <a:tailEnd type="none" w="med" len="med"/>
+                    </a:lnB>
+                  </a:tcPr>
+                </a:tc>
+                <a:tc>
+                  <a:txBody>
+                    <a:bodyPr/>
+                    <a:lstStyle/>
+                    <a:p>
+                      <a:pPr algn="ctr" indent="0" marL="0">
+                        <a:buNone/>
+                      </a:pPr>
+                      <a:r>
+                        <a:rPr lang="en-US" sz="1150" dirty="0">
+                          <a:solidFill>
+                            <a:srgbClr val="000000"/>
+                          </a:solidFill>
+                          <a:latin typeface="Calibri" pitchFamily="34" charset="0"/>
+                          <a:ea typeface="Calibri" pitchFamily="34" charset="-122"/>
+                          <a:cs typeface="Calibri" pitchFamily="34" charset="-120"/>
+                        </a:rPr>
+                        <a:t>5,782</a:t>
+                      </a:r>
+                      <a:endParaRPr lang="en-US" sz="1150" dirty="0">
+                        <a:latin typeface="Calibri" charset="0"/>
+                        <a:ea typeface="Calibri" charset="0"/>
+                        <a:cs typeface="Calibri" charset="0"/>
+                      </a:endParaRPr>
+                    </a:p>
+                  </a:txBody>
+                  <a:tcPr marL="91440" marR="91440" marT="45720" marB="45720" anchor="ctr">
+                    <a:lnL w="6350" cap="flat" cmpd="sng" algn="ctr">
+                      <a:solidFill>
+                        <a:srgbClr val="BFBFBF"/>
+                      </a:solidFill>
+                      <a:prstDash val="solid"/>
+                      <a:round/>
+                      <a:headEnd type="none" w="med" len="med"/>
+                      <a:tailEnd type="none" w="med" len="med"/>
+                    </a:lnL>
+                    <a:lnR w="6350" cap="flat" cmpd="sng" algn="ctr">
+                      <a:solidFill>
+                        <a:srgbClr val="BFBFBF"/>
+                      </a:solidFill>
+                      <a:prstDash val="solid"/>
+                      <a:round/>
+                      <a:headEnd type="none" w="med" len="med"/>
+                      <a:tailEnd type="none" w="med" len="med"/>
+                    </a:lnR>
+                    <a:lnT w="6350" cap="flat" cmpd="sng" algn="ctr">
+                      <a:solidFill>
+                        <a:srgbClr val="BFBFBF"/>
+                      </a:solidFill>
+                      <a:prstDash val="solid"/>
+                      <a:round/>
+                      <a:headEnd type="none" w="med" len="med"/>
+                      <a:tailEnd type="none" w="med" len="med"/>
+                    </a:lnT>
+                    <a:lnB w="6350" cap="flat" cmpd="sng" algn="ctr">
+                      <a:solidFill>
+                        <a:srgbClr val="BFBFBF"/>
+                      </a:solidFill>
+                      <a:prstDash val="solid"/>
+                      <a:round/>
+                      <a:headEnd type="none" w="med" len="med"/>
+                      <a:tailEnd type="none" w="med" len="med"/>
+                    </a:lnB>
+                  </a:tcPr>
+                </a:tc>
+              </a:tr>
+              <a:tr h="310896">
+                <a:tc>
+                  <a:txBody>
+                    <a:bodyPr/>
+                    <a:lstStyle/>
+                    <a:p>
+                      <a:pPr algn="l" indent="0" marL="0">
+                        <a:buNone/>
+                      </a:pPr>
+                      <a:r>
+                        <a:rPr lang="en-US" sz="1150" dirty="0">
+                          <a:solidFill>
+                            <a:srgbClr val="000000"/>
+                          </a:solidFill>
+                          <a:latin typeface="Calibri" pitchFamily="34" charset="0"/>
+                          <a:ea typeface="Calibri" pitchFamily="34" charset="-122"/>
+                          <a:cs typeface="Calibri" pitchFamily="34" charset="-120"/>
+                        </a:rPr>
+                        <a:t>ALS</a:t>
+                      </a:r>
+                      <a:endParaRPr lang="en-US" sz="1150" dirty="0">
+                        <a:latin typeface="Calibri" charset="0"/>
+                        <a:ea typeface="Calibri" charset="0"/>
+                        <a:cs typeface="Calibri" charset="0"/>
+                      </a:endParaRPr>
+                    </a:p>
+                  </a:txBody>
+                  <a:tcPr marL="91440" marR="91440" marT="45720" marB="45720" anchor="ctr">
+                    <a:lnL w="6350" cap="flat" cmpd="sng" algn="ctr">
+                      <a:solidFill>
+                        <a:srgbClr val="BFBFBF"/>
+                      </a:solidFill>
+                      <a:prstDash val="solid"/>
+                      <a:round/>
+                      <a:headEnd type="none" w="med" len="med"/>
+                      <a:tailEnd type="none" w="med" len="med"/>
+                    </a:lnL>
+                    <a:lnR w="6350" cap="flat" cmpd="sng" algn="ctr">
+                      <a:solidFill>
+                        <a:srgbClr val="BFBFBF"/>
+                      </a:solidFill>
+                      <a:prstDash val="solid"/>
+                      <a:round/>
+                      <a:headEnd type="none" w="med" len="med"/>
+                      <a:tailEnd type="none" w="med" len="med"/>
+                    </a:lnR>
+                    <a:lnT w="6350" cap="flat" cmpd="sng" algn="ctr">
+                      <a:solidFill>
+                        <a:srgbClr val="BFBFBF"/>
+                      </a:solidFill>
+                      <a:prstDash val="solid"/>
+                      <a:round/>
+                      <a:headEnd type="none" w="med" len="med"/>
+                      <a:tailEnd type="none" w="med" len="med"/>
+                    </a:lnT>
+                    <a:lnB w="6350" cap="flat" cmpd="sng" algn="ctr">
+                      <a:solidFill>
+                        <a:srgbClr val="BFBFBF"/>
+                      </a:solidFill>
+                      <a:prstDash val="solid"/>
+                      <a:round/>
+                      <a:headEnd type="none" w="med" len="med"/>
+                      <a:tailEnd type="none" w="med" len="med"/>
+                    </a:lnB>
+                  </a:tcPr>
+                </a:tc>
+                <a:tc>
+                  <a:txBody>
+                    <a:bodyPr/>
+                    <a:lstStyle/>
+                    <a:p>
+                      <a:pPr algn="ctr" indent="0" marL="0">
+                        <a:buNone/>
+                      </a:pPr>
+                      <a:r>
+                        <a:rPr lang="en-US" sz="1150" dirty="0">
+                          <a:solidFill>
+                            <a:srgbClr val="000000"/>
+                          </a:solidFill>
+                          <a:latin typeface="Calibri" pitchFamily="34" charset="0"/>
+                          <a:ea typeface="Calibri" pitchFamily="34" charset="-122"/>
+                          <a:cs typeface="Calibri" pitchFamily="34" charset="-120"/>
+                        </a:rPr>
+                        <a:t>5,657</a:t>
+                      </a:r>
+                      <a:endParaRPr lang="en-US" sz="1150" dirty="0">
+                        <a:latin typeface="Calibri" charset="0"/>
+                        <a:ea typeface="Calibri" charset="0"/>
+                        <a:cs typeface="Calibri" charset="0"/>
+                      </a:endParaRPr>
+                    </a:p>
+                  </a:txBody>
+                  <a:tcPr marL="91440" marR="91440" marT="45720" marB="45720" anchor="ctr">
+                    <a:lnL w="6350" cap="flat" cmpd="sng" algn="ctr">
+                      <a:solidFill>
+                        <a:srgbClr val="BFBFBF"/>
+                      </a:solidFill>
+                      <a:prstDash val="solid"/>
+                      <a:round/>
+                      <a:headEnd type="none" w="med" len="med"/>
+                      <a:tailEnd type="none" w="med" len="med"/>
+                    </a:lnL>
+                    <a:lnR w="6350" cap="flat" cmpd="sng" algn="ctr">
+                      <a:solidFill>
+                        <a:srgbClr val="BFBFBF"/>
+                      </a:solidFill>
+                      <a:prstDash val="solid"/>
+                      <a:round/>
+                      <a:headEnd type="none" w="med" len="med"/>
+                      <a:tailEnd type="none" w="med" len="med"/>
+                    </a:lnR>
+                    <a:lnT w="6350" cap="flat" cmpd="sng" algn="ctr">
+                      <a:solidFill>
+                        <a:srgbClr val="BFBFBF"/>
+                      </a:solidFill>
+                      <a:prstDash val="solid"/>
+                      <a:round/>
+                      <a:headEnd type="none" w="med" len="med"/>
+                      <a:tailEnd type="none" w="med" len="med"/>
+                    </a:lnT>
+                    <a:lnB w="6350" cap="flat" cmpd="sng" algn="ctr">
+                      <a:solidFill>
+                        <a:srgbClr val="BFBFBF"/>
+                      </a:solidFill>
+                      <a:prstDash val="solid"/>
+                      <a:round/>
+                      <a:headEnd type="none" w="med" len="med"/>
+                      <a:tailEnd type="none" w="med" len="med"/>
+                    </a:lnB>
+                  </a:tcPr>
+                </a:tc>
+              </a:tr>
+              <a:tr h="310896">
+                <a:tc>
+                  <a:txBody>
+                    <a:bodyPr/>
+                    <a:lstStyle/>
+                    <a:p>
+                      <a:pPr algn="l" indent="0" marL="0">
+                        <a:buNone/>
+                      </a:pPr>
+                      <a:r>
+                        <a:rPr lang="en-US" sz="1150" dirty="0">
+                          <a:solidFill>
+                            <a:srgbClr val="000000"/>
+                          </a:solidFill>
+                          <a:latin typeface="Calibri" pitchFamily="34" charset="0"/>
+                          <a:ea typeface="Calibri" pitchFamily="34" charset="-122"/>
+                          <a:cs typeface="Calibri" pitchFamily="34" charset="-120"/>
+                        </a:rPr>
+                        <a:t>BLS without NMTARA</a:t>
+                      </a:r>
+                      <a:endParaRPr lang="en-US" sz="1150" dirty="0">
+                        <a:latin typeface="Calibri" charset="0"/>
+                        <a:ea typeface="Calibri" charset="0"/>
+                        <a:cs typeface="Calibri" charset="0"/>
+                      </a:endParaRPr>
+                    </a:p>
+                  </a:txBody>
+                  <a:tcPr marL="91440" marR="91440" marT="45720" marB="45720" anchor="ctr">
+                    <a:lnL w="6350" cap="flat" cmpd="sng" algn="ctr">
+                      <a:solidFill>
+                        <a:srgbClr val="BFBFBF"/>
+                      </a:solidFill>
+                      <a:prstDash val="solid"/>
+                      <a:round/>
+                      <a:headEnd type="none" w="med" len="med"/>
+                      <a:tailEnd type="none" w="med" len="med"/>
+                    </a:lnL>
+                    <a:lnR w="6350" cap="flat" cmpd="sng" algn="ctr">
+                      <a:solidFill>
+                        <a:srgbClr val="BFBFBF"/>
+                      </a:solidFill>
+                      <a:prstDash val="solid"/>
+                      <a:round/>
+                      <a:headEnd type="none" w="med" len="med"/>
+                      <a:tailEnd type="none" w="med" len="med"/>
+                    </a:lnR>
+                    <a:lnT w="6350" cap="flat" cmpd="sng" algn="ctr">
+                      <a:solidFill>
+                        <a:srgbClr val="BFBFBF"/>
+                      </a:solidFill>
+                      <a:prstDash val="solid"/>
+                      <a:round/>
+                      <a:headEnd type="none" w="med" len="med"/>
+                      <a:tailEnd type="none" w="med" len="med"/>
+                    </a:lnT>
+                    <a:lnB w="6350" cap="flat" cmpd="sng" algn="ctr">
+                      <a:solidFill>
+                        <a:srgbClr val="BFBFBF"/>
+                      </a:solidFill>
+                      <a:prstDash val="solid"/>
+                      <a:round/>
+                      <a:headEnd type="none" w="med" len="med"/>
+                      <a:tailEnd type="none" w="med" len="med"/>
+                    </a:lnB>
+                  </a:tcPr>
+                </a:tc>
+                <a:tc>
+                  <a:txBody>
+                    <a:bodyPr/>
+                    <a:lstStyle/>
+                    <a:p>
+                      <a:pPr algn="ctr" indent="0" marL="0">
+                        <a:buNone/>
+                      </a:pPr>
+                      <a:r>
+                        <a:rPr lang="en-US" sz="1150" dirty="0">
+                          <a:solidFill>
+                            <a:srgbClr val="000000"/>
+                          </a:solidFill>
+                          <a:latin typeface="Calibri" pitchFamily="34" charset="0"/>
+                          <a:ea typeface="Calibri" pitchFamily="34" charset="-122"/>
+                          <a:cs typeface="Calibri" pitchFamily="34" charset="-120"/>
+                        </a:rPr>
+                        <a:t>1,747</a:t>
+                      </a:r>
+                      <a:endParaRPr lang="en-US" sz="1150" dirty="0">
+                        <a:latin typeface="Calibri" charset="0"/>
+                        <a:ea typeface="Calibri" charset="0"/>
+                        <a:cs typeface="Calibri" charset="0"/>
+                      </a:endParaRPr>
+                    </a:p>
+                  </a:txBody>
+                  <a:tcPr marL="91440" marR="91440" marT="45720" marB="45720" anchor="ctr">
+                    <a:lnL w="6350" cap="flat" cmpd="sng" algn="ctr">
+                      <a:solidFill>
+                        <a:srgbClr val="BFBFBF"/>
+                      </a:solidFill>
+                      <a:prstDash val="solid"/>
+                      <a:round/>
+                      <a:headEnd type="none" w="med" len="med"/>
+                      <a:tailEnd type="none" w="med" len="med"/>
+                    </a:lnL>
+                    <a:lnR w="6350" cap="flat" cmpd="sng" algn="ctr">
+                      <a:solidFill>
+                        <a:srgbClr val="BFBFBF"/>
+                      </a:solidFill>
+                      <a:prstDash val="solid"/>
+                      <a:round/>
+                      <a:headEnd type="none" w="med" len="med"/>
+                      <a:tailEnd type="none" w="med" len="med"/>
+                    </a:lnR>
+                    <a:lnT w="6350" cap="flat" cmpd="sng" algn="ctr">
+                      <a:solidFill>
+                        <a:srgbClr val="BFBFBF"/>
+                      </a:solidFill>
+                      <a:prstDash val="solid"/>
+                      <a:round/>
+                      <a:headEnd type="none" w="med" len="med"/>
+                      <a:tailEnd type="none" w="med" len="med"/>
+                    </a:lnT>
+                    <a:lnB w="6350" cap="flat" cmpd="sng" algn="ctr">
+                      <a:solidFill>
+                        <a:srgbClr val="BFBFBF"/>
+                      </a:solidFill>
+                      <a:prstDash val="solid"/>
+                      <a:round/>
+                      <a:headEnd type="none" w="med" len="med"/>
+                      <a:tailEnd type="none" w="med" len="med"/>
+                    </a:lnB>
+                  </a:tcPr>
+                </a:tc>
+              </a:tr>
+              <a:tr h="310896">
+                <a:tc>
+                  <a:txBody>
+                    <a:bodyPr/>
+                    <a:lstStyle/>
+                    <a:p>
+                      <a:pPr algn="l" indent="0" marL="0">
+                        <a:buNone/>
+                      </a:pPr>
+                      <a:r>
+                        <a:rPr lang="en-US" sz="1150" dirty="0">
+                          <a:solidFill>
+                            <a:srgbClr val="000000"/>
+                          </a:solidFill>
+                          <a:latin typeface="Calibri" pitchFamily="34" charset="0"/>
+                          <a:ea typeface="Calibri" pitchFamily="34" charset="-122"/>
+                          <a:cs typeface="Calibri" pitchFamily="34" charset="-120"/>
+                        </a:rPr>
+                        <a:t>All remaining</a:t>
+                      </a:r>
+                      <a:endParaRPr lang="en-US" sz="1150" dirty="0">
+                        <a:latin typeface="Calibri" charset="0"/>
+                        <a:ea typeface="Calibri" charset="0"/>
+                        <a:cs typeface="Calibri" charset="0"/>
+                      </a:endParaRPr>
+                    </a:p>
+                  </a:txBody>
+                  <a:tcPr marL="91440" marR="91440" marT="45720" marB="45720" anchor="ctr">
+                    <a:lnL w="6350" cap="flat" cmpd="sng" algn="ctr">
+                      <a:solidFill>
+                        <a:srgbClr val="BFBFBF"/>
+                      </a:solidFill>
+                      <a:prstDash val="solid"/>
+                      <a:round/>
+                      <a:headEnd type="none" w="med" len="med"/>
+                      <a:tailEnd type="none" w="med" len="med"/>
+                    </a:lnL>
+                    <a:lnR w="6350" cap="flat" cmpd="sng" algn="ctr">
+                      <a:solidFill>
+                        <a:srgbClr val="BFBFBF"/>
+                      </a:solidFill>
+                      <a:prstDash val="solid"/>
+                      <a:round/>
+                      <a:headEnd type="none" w="med" len="med"/>
+                      <a:tailEnd type="none" w="med" len="med"/>
+                    </a:lnR>
+                    <a:lnT w="6350" cap="flat" cmpd="sng" algn="ctr">
+                      <a:solidFill>
+                        <a:srgbClr val="BFBFBF"/>
+                      </a:solidFill>
+                      <a:prstDash val="solid"/>
+                      <a:round/>
+                      <a:headEnd type="none" w="med" len="med"/>
+                      <a:tailEnd type="none" w="med" len="med"/>
+                    </a:lnT>
+                    <a:lnB w="6350" cap="flat" cmpd="sng" algn="ctr">
+                      <a:solidFill>
+                        <a:srgbClr val="BFBFBF"/>
+                      </a:solidFill>
+                      <a:prstDash val="solid"/>
+                      <a:round/>
+                      <a:headEnd type="none" w="med" len="med"/>
+                      <a:tailEnd type="none" w="med" len="med"/>
+                    </a:lnB>
+                  </a:tcPr>
+                </a:tc>
+                <a:tc>
+                  <a:txBody>
+                    <a:bodyPr/>
+                    <a:lstStyle/>
+                    <a:p>
+                      <a:pPr algn="ctr" indent="0" marL="0">
+                        <a:buNone/>
+                      </a:pPr>
+                      <a:r>
+                        <a:rPr lang="en-US" sz="1150" dirty="0">
+                          <a:solidFill>
+                            <a:srgbClr val="000000"/>
+                          </a:solidFill>
+                          <a:latin typeface="Calibri" pitchFamily="34" charset="0"/>
+                          <a:ea typeface="Calibri" pitchFamily="34" charset="-122"/>
+                          <a:cs typeface="Calibri" pitchFamily="34" charset="-120"/>
+                        </a:rPr>
+                        <a:t>1,859</a:t>
+                      </a:r>
+                      <a:endParaRPr lang="en-US" sz="1150" dirty="0">
+                        <a:latin typeface="Calibri" charset="0"/>
+                        <a:ea typeface="Calibri" charset="0"/>
+                        <a:cs typeface="Calibri" charset="0"/>
+                      </a:endParaRPr>
+                    </a:p>
+                  </a:txBody>
+                  <a:tcPr marL="91440" marR="91440" marT="45720" marB="45720" anchor="ctr">
+                    <a:lnL w="6350" cap="flat" cmpd="sng" algn="ctr">
+                      <a:solidFill>
+                        <a:srgbClr val="BFBFBF"/>
+                      </a:solidFill>
+                      <a:prstDash val="solid"/>
+                      <a:round/>
+                      <a:headEnd type="none" w="med" len="med"/>
+                      <a:tailEnd type="none" w="med" len="med"/>
+                    </a:lnL>
+                    <a:lnR w="6350" cap="flat" cmpd="sng" algn="ctr">
+                      <a:solidFill>
+                        <a:srgbClr val="BFBFBF"/>
+                      </a:solidFill>
+                      <a:prstDash val="solid"/>
+                      <a:round/>
+                      <a:headEnd type="none" w="med" len="med"/>
+                      <a:tailEnd type="none" w="med" len="med"/>
+                    </a:lnR>
+                    <a:lnT w="6350" cap="flat" cmpd="sng" algn="ctr">
+                      <a:solidFill>
+                        <a:srgbClr val="BFBFBF"/>
+                      </a:solidFill>
+                      <a:prstDash val="solid"/>
+                      <a:round/>
+                      <a:headEnd type="none" w="med" len="med"/>
+                      <a:tailEnd type="none" w="med" len="med"/>
+                    </a:lnT>
+                    <a:lnB w="6350" cap="flat" cmpd="sng" algn="ctr">
+                      <a:solidFill>
+                        <a:srgbClr val="BFBFBF"/>
+                      </a:solidFill>
+                      <a:prstDash val="solid"/>
+                      <a:round/>
+                      <a:headEnd type="none" w="med" len="med"/>
+                      <a:tailEnd type="none" w="med" len="med"/>
+                    </a:lnB>
+                  </a:tcPr>
+                </a:tc>
+              </a:tr>
+            </a:tbl>
+          </a:graphicData>
+        </a:graphic>
+      </p:graphicFrame>
+      <p:sp>
+        <p:nvSpPr>
+          <p:cNvPr id="5" name="Text 2"/>
+          <p:cNvSpPr/>
+          <p:nvPr/>
+        </p:nvSpPr>
+        <p:spPr>
+          <a:xfrm>
+            <a:off x="5486400" y="1371600"/>
+            <a:ext cx="6217920" cy="4572000"/>
+          </a:xfrm>
+          <a:prstGeom prst="rect">
+            <a:avLst/>
+          </a:prstGeom>
+          <a:noFill/>
+          <a:ln/>
+        </p:spPr>
+        <p:txBody>
+          <a:bodyPr wrap="square" rtlCol="0" anchor="t"/>
+          <a:lstStyle/>
+          <a:p>
+            <a:pPr indent="0" marL="0">
+              <a:lnSpc>
+                <a:spcPts val="1700"/>
+              </a:lnSpc>
+              <a:spcAft>
+                <a:spcPts val="800"/>
+              </a:spcAft>
+              <a:buNone/>
+            </a:pPr>
+            <a:r>
+              <a:rPr lang="en-US" sz="1300" b="1" dirty="0">
+                <a:solidFill>
+                  <a:srgbClr val="000000"/>
+                </a:solidFill>
+                <a:latin typeface="Calibri" pitchFamily="34" charset="0"/>
+                <a:ea typeface="Calibri" pitchFamily="34" charset="-122"/>
+                <a:cs typeface="Calibri" pitchFamily="34" charset="-120"/>
+              </a:rPr>
+              <a:t>79,671 calls sit in one category. </a:t>
+            </a:r>
+            <a:pPr indent="0" marL="0">
+              <a:lnSpc>
+                <a:spcPts val="1700"/>
+              </a:lnSpc>
+              <a:spcAft>
+                <a:spcPts val="800"/>
+              </a:spcAft>
+              <a:buNone/>
+            </a:pPr>
+            <a:r>
+              <a:rPr lang="en-US" sz="1300" dirty="0">
+                <a:solidFill>
+                  <a:srgbClr val="000000"/>
+                </a:solidFill>
+                <a:latin typeface="Calibri" pitchFamily="34" charset="0"/>
+                <a:ea typeface="Calibri" pitchFamily="34" charset="-122"/>
+                <a:cs typeface="Calibri" pitchFamily="34" charset="-120"/>
+              </a:rPr>
+              <a:t>It mixes emergency transports, ER referrals, and virtual care under a single label. The largest single label inside it is BLS for NMTARA 0 at 38,343 calls, followed by NN ER at 18,428.</a:t>
+            </a:r>
+            <a:endParaRPr lang="en-US" sz="1300" dirty="0"/>
+          </a:p>
+        </p:txBody>
+      </p:sp>
+      <p:sp>
+        <p:nvSpPr>
+          <p:cNvPr id="6" name="Text 3"/>
+          <p:cNvSpPr/>
+          <p:nvPr/>
+        </p:nvSpPr>
+        <p:spPr>
+          <a:xfrm>
+            <a:off x="5486400" y="3108960"/>
+            <a:ext cx="6217920" cy="4572000"/>
+          </a:xfrm>
+          <a:prstGeom prst="rect">
+            <a:avLst/>
+          </a:prstGeom>
+          <a:noFill/>
+          <a:ln/>
+        </p:spPr>
+        <p:txBody>
+          <a:bodyPr wrap="square" rtlCol="0" anchor="t"/>
+          <a:lstStyle/>
+          <a:p>
+            <a:pPr indent="0" marL="0">
+              <a:lnSpc>
+                <a:spcPts val="1700"/>
+              </a:lnSpc>
+              <a:spcAft>
+                <a:spcPts val="800"/>
+              </a:spcAft>
+              <a:buNone/>
+            </a:pPr>
+            <a:r>
+              <a:rPr lang="en-US" sz="1300" dirty="0">
+                <a:solidFill>
+                  <a:srgbClr val="000000"/>
+                </a:solidFill>
+                <a:latin typeface="Calibri" pitchFamily="34" charset="0"/>
+                <a:ea typeface="Calibri" pitchFamily="34" charset="-122"/>
+                <a:cs typeface="Calibri" pitchFamily="34" charset="-120"/>
+              </a:rPr>
+              <a:t>While these calls sit together, diversion potential, cost, and clinical pattern cannot be measured for the group. </a:t>
+            </a:r>
+            <a:pPr indent="0" marL="0">
+              <a:lnSpc>
+                <a:spcPts val="1700"/>
+              </a:lnSpc>
+              <a:spcAft>
+                <a:spcPts val="800"/>
+              </a:spcAft>
+              <a:buNone/>
+            </a:pPr>
+            <a:r>
+              <a:rPr lang="en-US" sz="1300" dirty="0">
+                <a:solidFill>
+                  <a:srgbClr val="000000"/>
+                </a:solidFill>
+                <a:latin typeface="Calibri" pitchFamily="34" charset="0"/>
+                <a:ea typeface="Calibri" pitchFamily="34" charset="-122"/>
+                <a:cs typeface="Calibri" pitchFamily="34" charset="-120"/>
+              </a:rPr>
+              <a:t>Separating it into component outcomes is required before it can be read.</a:t>
+            </a:r>
+            <a:endParaRPr lang="en-US" sz="1300" dirty="0"/>
+          </a:p>
+        </p:txBody>
+      </p:sp>
+      <p:sp>
+        <p:nvSpPr>
+          <p:cNvPr id="7" name="Shape 4"/>
+          <p:cNvSpPr/>
+          <p:nvPr/>
+        </p:nvSpPr>
+        <p:spPr>
+          <a:xfrm>
+            <a:off x="457200" y="5779008"/>
+            <a:ext cx="11274552" cy="0"/>
+          </a:xfrm>
+          <a:prstGeom prst="line">
+            <a:avLst/>
+          </a:prstGeom>
+          <a:noFill/>
+          <a:ln w="9525">
+            <a:solidFill>
+              <a:srgbClr val="BFBFBF"/>
+            </a:solidFill>
+            <a:prstDash val="solid"/>
+          </a:ln>
+        </p:spPr>
+      </p:sp>
+      <p:sp>
+        <p:nvSpPr>
+          <p:cNvPr id="8" name="Text 5"/>
+          <p:cNvSpPr/>
+          <p:nvPr/>
+        </p:nvSpPr>
+        <p:spPr>
+          <a:xfrm>
+            <a:off x="457200" y="5907024"/>
+            <a:ext cx="11274552" cy="868680"/>
+          </a:xfrm>
+          <a:prstGeom prst="rect">
+            <a:avLst/>
+          </a:prstGeom>
+          <a:noFill/>
+          <a:ln/>
+        </p:spPr>
+        <p:txBody>
+          <a:bodyPr wrap="square" rtlCol="0" anchor="t"/>
+          <a:lstStyle/>
+          <a:p>
+            <a:pPr indent="0" marL="0">
+              <a:lnSpc>
+                <a:spcPts val="1300"/>
+              </a:lnSpc>
+              <a:buNone/>
+            </a:pPr>
+            <a:r>
+              <a:rPr lang="en-US" sz="1050" b="1" dirty="0">
+                <a:solidFill>
+                  <a:srgbClr val="000000"/>
+                </a:solidFill>
+                <a:latin typeface="Calibri" pitchFamily="34" charset="0"/>
+                <a:ea typeface="Calibri" pitchFamily="34" charset="-122"/>
+                <a:cs typeface="Calibri" pitchFamily="34" charset="-120"/>
+              </a:rPr>
+              <a:t>How this was derived:  </a:t>
+            </a:r>
+            <a:pPr indent="0" marL="0">
+              <a:lnSpc>
+                <a:spcPts val="1300"/>
+              </a:lnSpc>
+              <a:buNone/>
+            </a:pPr>
+            <a:r>
+              <a:rPr lang="en-US" sz="1050" dirty="0">
+                <a:solidFill>
+                  <a:srgbClr val="000000"/>
+                </a:solidFill>
+                <a:latin typeface="Calibri" pitchFamily="34" charset="0"/>
+                <a:ea typeface="Calibri" pitchFamily="34" charset="-122"/>
+                <a:cs typeface="Calibri" pitchFamily="34" charset="-120"/>
+              </a:rPr>
+              <a:t>Source: the code map’s residual group - every disposition that is not self-care, not an override, and not NMTARA 6 falls to Other. Population: all 150,003 calls; 79,671 land here. Label counts come from Transaction Response Names within this group.</a:t>
+            </a:r>
+            <a:endParaRPr lang="en-US" sz="1050" dirty="0"/>
+          </a:p>
+        </p:txBody>
+      </p:sp>
+    </p:spTree>
+  </p:cSld>
+  <p:clrMapOvr>
+    <a:masterClrMapping/>
+  </p:clrMapOvr>
+</p:sld>
+</file>
+
+<file path=ppt/slides/slide12.xml><?xml version="1.0" encoding="utf-8"?>
+<p:sld xmlns:a="http://schemas.openxmlformats.org/drawingml/2006/main" xmlns:r="http://schemas.openxmlformats.org/officeDocument/2006/relationships" xmlns:p="http://schemas.openxmlformats.org/presentationml/2006/main">
+  <p:cSld name="Slide 12">
+    <p:spTree>
+      <p:nvGrpSpPr>
+        <p:cNvPr id="1" name=""/>
+        <p:cNvGrpSpPr/>
+        <p:nvPr/>
+      </p:nvGrpSpPr>
+      <p:grpSpPr>
+        <a:xfrm>
+          <a:off x="0" y="0"/>
+          <a:ext cx="0" cy="0"/>
+          <a:chOff x="0" y="0"/>
+          <a:chExt cx="0" cy="0"/>
+        </a:xfrm>
+      </p:grpSpPr>
+      <p:sp>
+        <p:nvSpPr>
+          <p:cNvPr id="2" name="Text 0"/>
+          <p:cNvSpPr/>
+          <p:nvPr/>
+        </p:nvSpPr>
+        <p:spPr>
+          <a:xfrm>
+            <a:off x="457200" y="292608"/>
+            <a:ext cx="11247120" cy="502920"/>
+          </a:xfrm>
+          <a:prstGeom prst="rect">
+            <a:avLst/>
+          </a:prstGeom>
+          <a:noFill/>
+          <a:ln/>
+        </p:spPr>
+        <p:txBody>
+          <a:bodyPr wrap="square" rtlCol="0" anchor="ctr"/>
+          <a:lstStyle/>
+          <a:p>
+            <a:pPr indent="0" marL="0">
+              <a:buNone/>
+            </a:pPr>
+            <a:r>
+              <a:rPr lang="en-US" sz="2400" b="1" dirty="0">
+                <a:solidFill>
+                  <a:srgbClr val="000000"/>
+                </a:solidFill>
+                <a:latin typeface="Calibri" pitchFamily="34" charset="0"/>
+                <a:ea typeface="Calibri" pitchFamily="34" charset="-122"/>
+                <a:cs typeface="Calibri" pitchFamily="34" charset="-120"/>
+              </a:rPr>
+              <a:t>What needs a decision</a:t>
+            </a:r>
+            <a:endParaRPr lang="en-US" sz="2400" dirty="0"/>
+          </a:p>
+        </p:txBody>
+      </p:sp>
+      <p:graphicFrame>
+        <p:nvGraphicFramePr>
+          <p:cNvPr id="13" name="Table 0"/>
           <p:cNvGraphicFramePr>
             <a:graphicFrameLocks noGrp="1"/>
           </p:cNvGraphicFramePr>
@@ -3076,9 +5000,9 @@
 </p:sld>
 </file>
 
-<file path=ppt/slides/slide11.xml><?xml version="1.0" encoding="utf-8"?>
+<file path=ppt/slides/slide13.xml><?xml version="1.0" encoding="utf-8"?>
 <p:sld xmlns:a="http://schemas.openxmlformats.org/drawingml/2006/main" xmlns:r="http://schemas.openxmlformats.org/officeDocument/2006/relationships" xmlns:p="http://schemas.openxmlformats.org/presentationml/2006/main">
-  <p:cSld name="Slide 11">
+  <p:cSld name="Slide 13">
     <p:spTree>
       <p:nvGrpSpPr>
         <p:cNvPr id="1" name=""/>
@@ -5361,7 +7285,7 @@
                 <a:ea typeface="Calibri" pitchFamily="34" charset="-122"/>
                 <a:cs typeface="Calibri" pitchFamily="34" charset="-120"/>
               </a:rPr>
-              <a:t>Call drop and technical issues</a:t>
+              <a:t>What self-care actually means</a:t>
             </a:r>
             <a:endParaRPr lang="en-US" sz="2400" dirty="0"/>
           </a:p>
@@ -5400,7 +7324,7 @@
                 <a:ea typeface="Calibri" pitchFamily="34" charset="-122"/>
                 <a:cs typeface="Calibri" pitchFamily="34" charset="-120"/>
               </a:rPr>
-              <a:t>Within the 14,465 calls where triage did not complete</a:t>
+              <a:t>The 25,174 self-care calls split by what the patient did next</a:t>
             </a:r>
             <a:endParaRPr lang="en-US" sz="1300" dirty="0"/>
           </a:p>
@@ -5408,7 +7332,7 @@
       </p:sp>
       <p:pic>
         <p:nvPicPr>
-          <p:cNvPr id="4" name="Image 0" descr="/home/claude/charts/calldrop.png">    </p:cNvPr>
+          <p:cNvPr id="4" name="Image 0" descr="/home/claude/charts/sc_subtypes.png">    </p:cNvPr>
           <p:cNvPicPr>
             <a:picLocks noChangeAspect="1"/>
           </p:cNvPicPr>
@@ -5423,7 +7347,7 @@
         <p:spPr>
           <a:xfrm>
             <a:off x="411480" y="1234440"/>
-            <a:ext cx="6583680" cy="3566160"/>
+            <a:ext cx="6583680" cy="3383280"/>
           </a:xfrm>
           <a:prstGeom prst="rect">
             <a:avLst/>
@@ -5469,7 +7393,7 @@
                 <a:ea typeface="Calibri" pitchFamily="34" charset="-122"/>
                 <a:cs typeface="Calibri" pitchFamily="34" charset="-120"/>
               </a:rPr>
-              <a:t>Of the 14,465 calls where triage did not complete, 3,384 (23.4%) ended from a dropped call or a technical issue rather than a clinical reason. </a:t>
+              <a:t>Self-care today records only that no ambulance, transport, or referral was arranged - not what the patient did next. </a:t>
             </a:r>
             <a:pPr indent="0" marL="0">
               <a:lnSpc>
@@ -5489,7 +7413,7 @@
                 <a:ea typeface="Calibri" pitchFamily="34" charset="-122"/>
                 <a:cs typeface="Calibri" pitchFamily="34" charset="-120"/>
               </a:rPr>
-              <a:t>The volume concentrates in a small set of markets: Seattle WA (461), Wake County NC (455), Dekalb County GA (446), and Baltimore MD (364) lead.</a:t>
+              <a:t>Reading the notes, 14,939 (59.3%) stayed home on nurse advice. 7,541 (30%) refused or declined further care. 2,001 (7.9%) self-transported to urgent care, and 1,341 (5.3%) self-transported to the ED. A small group, 455 (1.8%), were waiting for an existing appointment.</a:t>
             </a:r>
             <a:endParaRPr lang="en-US" sz="1200" dirty="0"/>
           </a:p>
@@ -5503,7 +7427,7 @@
         </p:nvSpPr>
         <p:spPr>
           <a:xfrm>
-            <a:off x="7223760" y="3383280"/>
+            <a:off x="7223760" y="3566160"/>
             <a:ext cx="4480560" cy="4572000"/>
           </a:xfrm>
           <a:prstGeom prst="rect">
@@ -5534,7 +7458,7 @@
                 <a:ea typeface="Calibri" pitchFamily="34" charset="-122"/>
                 <a:cs typeface="Calibri" pitchFamily="34" charset="-120"/>
               </a:rPr>
-              <a:t>This is measured across every call from the note text, not a sample. </a:t>
+              <a:t>6,332 (25.2%) could not be determined from the notes. </a:t>
             </a:r>
             <a:pPr indent="0" marL="0">
               <a:lnSpc>
@@ -5554,7 +7478,7 @@
                 <a:ea typeface="Calibri" pitchFamily="34" charset="-122"/>
                 <a:cs typeface="Calibri" pitchFamily="34" charset="-120"/>
               </a:rPr>
-              <a:t>It replaces the earlier sample-based 17% estimate; the two figures are different measurements and should be reconciled.</a:t>
+              <a:t>Because a call can match more than one phrase, the sub-types overlap and do not sum to 100%.</a:t>
             </a:r>
             <a:endParaRPr lang="en-US" sz="1200" dirty="0"/>
           </a:p>
@@ -5636,7 +7560,7 @@
                 <a:ea typeface="Calibri" pitchFamily="34" charset="-122"/>
                 <a:cs typeface="Calibri" pitchFamily="34" charset="-120"/>
               </a:rPr>
-              <a:t>Source: Nurses Notes on the 14,465 triage-not-completed calls (NMTARA 6 label). Each note scanned for disconnect and technical terms (dropped, disconnected, hung up, technical, lost call, no answer, could not reach). Full population, not a sample. Share = 3,384 / 14,465. Market split groups those flagged calls by Market Name.</a:t>
+              <a:t>Source: Nurses Notes on the 25,174 self-care calls (SELF-CARE disposition via the code map). Each note scanned for phrases indicating stayed-home, self-transport to ED, self-transport to urgent care, waiting for an appointment, or refusal. Full population, not a sample. A call matching no phrase is shown as “Unclear from notes.” Directional pending a note-sample audit.</a:t>
             </a:r>
             <a:endParaRPr lang="en-US" sz="1050" dirty="0"/>
           </a:p>
@@ -5700,7 +7624,7 @@
                 <a:ea typeface="Calibri" pitchFamily="34" charset="-122"/>
                 <a:cs typeface="Calibri" pitchFamily="34" charset="-120"/>
               </a:rPr>
-              <a:t>Half the calls are uncategorized</a:t>
+              <a:t>What conditions are resolved as self-care</a:t>
             </a:r>
             <a:endParaRPr lang="en-US" sz="2400" dirty="0"/>
           </a:p>
@@ -5739,1104 +7663,36 @@
                 <a:ea typeface="Calibri" pitchFamily="34" charset="-122"/>
                 <a:cs typeface="Calibri" pitchFamily="34" charset="-120"/>
               </a:rPr>
-              <a:t>79,671 calls, 53% of volume, in a single catch-all group</a:t>
+              <a:t>Top chief complaints among the 25,174 self-care calls</a:t>
             </a:r>
             <a:endParaRPr lang="en-US" sz="1300" dirty="0"/>
           </a:p>
         </p:txBody>
       </p:sp>
-      <p:graphicFrame>
-        <p:nvGraphicFramePr>
-          <p:cNvPr id="10" name="Table 0"/>
-          <p:cNvGraphicFramePr>
-            <a:graphicFrameLocks noGrp="1"/>
-          </p:cNvGraphicFramePr>
-          <p:nvPr>
-            <p:extLst>
-              <p:ext uri="{D42A27DB-BD31-4B8C-83A1-F6EECF244321}">
-                <p14:modId xmlns:p14="http://schemas.microsoft.com/office/powerpoint/2010/main" val="1579011935"/>
-              </p:ext>
-            </p:extLst>
-          </p:nvPr>
-        </p:nvGraphicFramePr>
-        <p:xfrm>
-          <a:off x="457200" y="1280160"/>
-          <a:ext cx="4572000" cy="914400"/>
-        </p:xfrm>
-        <a:graphic>
-          <a:graphicData uri="http://schemas.openxmlformats.org/drawingml/2006/table">
-            <a:tbl>
-              <a:tblPr/>
-              <a:tblGrid>
-                <a:gridCol w="3200400"/>
-                <a:gridCol w="1371600"/>
-              </a:tblGrid>
-              <a:tr h="310896">
-                <a:tc>
-                  <a:txBody>
-                    <a:bodyPr/>
-                    <a:lstStyle/>
-                    <a:p>
-                      <a:pPr indent="0" marL="0">
-                        <a:buNone/>
-                      </a:pPr>
-                      <a:r>
-                        <a:rPr lang="en-US" sz="1200" b="1" dirty="0">
-                          <a:solidFill>
-                            <a:srgbClr val="000000"/>
-                          </a:solidFill>
-                          <a:latin typeface="Calibri" pitchFamily="34" charset="0"/>
-                          <a:ea typeface="Calibri" pitchFamily="34" charset="-122"/>
-                          <a:cs typeface="Calibri" pitchFamily="34" charset="-120"/>
-                        </a:rPr>
-                        <a:t>Label inside the group</a:t>
-                      </a:r>
-                      <a:endParaRPr lang="en-US" sz="1200" dirty="0">
-                        <a:latin typeface="Calibri" charset="0"/>
-                        <a:ea typeface="Calibri" charset="0"/>
-                        <a:cs typeface="Calibri" charset="0"/>
-                      </a:endParaRPr>
-                    </a:p>
-                  </a:txBody>
-                  <a:tcPr marL="91440" marR="91440" marT="45720" marB="45720" anchor="ctr">
-                    <a:lnL w="6350" cap="flat" cmpd="sng" algn="ctr">
-                      <a:solidFill>
-                        <a:srgbClr val="BFBFBF"/>
-                      </a:solidFill>
-                      <a:prstDash val="solid"/>
-                      <a:round/>
-                      <a:headEnd type="none" w="med" len="med"/>
-                      <a:tailEnd type="none" w="med" len="med"/>
-                    </a:lnL>
-                    <a:lnR w="6350" cap="flat" cmpd="sng" algn="ctr">
-                      <a:solidFill>
-                        <a:srgbClr val="BFBFBF"/>
-                      </a:solidFill>
-                      <a:prstDash val="solid"/>
-                      <a:round/>
-                      <a:headEnd type="none" w="med" len="med"/>
-                      <a:tailEnd type="none" w="med" len="med"/>
-                    </a:lnR>
-                    <a:lnT w="6350" cap="flat" cmpd="sng" algn="ctr">
-                      <a:solidFill>
-                        <a:srgbClr val="BFBFBF"/>
-                      </a:solidFill>
-                      <a:prstDash val="solid"/>
-                      <a:round/>
-                      <a:headEnd type="none" w="med" len="med"/>
-                      <a:tailEnd type="none" w="med" len="med"/>
-                    </a:lnT>
-                    <a:lnB w="6350" cap="flat" cmpd="sng" algn="ctr">
-                      <a:solidFill>
-                        <a:srgbClr val="BFBFBF"/>
-                      </a:solidFill>
-                      <a:prstDash val="solid"/>
-                      <a:round/>
-                      <a:headEnd type="none" w="med" len="med"/>
-                      <a:tailEnd type="none" w="med" len="med"/>
-                    </a:lnB>
-                    <a:solidFill>
-                      <a:srgbClr val="F2F2F2"/>
-                    </a:solidFill>
-                  </a:tcPr>
-                </a:tc>
-                <a:tc>
-                  <a:txBody>
-                    <a:bodyPr/>
-                    <a:lstStyle/>
-                    <a:p>
-                      <a:pPr indent="0" marL="0">
-                        <a:buNone/>
-                      </a:pPr>
-                      <a:r>
-                        <a:rPr lang="en-US" sz="1200" b="1" dirty="0">
-                          <a:solidFill>
-                            <a:srgbClr val="000000"/>
-                          </a:solidFill>
-                          <a:latin typeface="Calibri" pitchFamily="34" charset="0"/>
-                          <a:ea typeface="Calibri" pitchFamily="34" charset="-122"/>
-                          <a:cs typeface="Calibri" pitchFamily="34" charset="-120"/>
-                        </a:rPr>
-                        <a:t>Calls</a:t>
-                      </a:r>
-                      <a:endParaRPr lang="en-US" sz="1200" dirty="0">
-                        <a:latin typeface="Calibri" charset="0"/>
-                        <a:ea typeface="Calibri" charset="0"/>
-                        <a:cs typeface="Calibri" charset="0"/>
-                      </a:endParaRPr>
-                    </a:p>
-                  </a:txBody>
-                  <a:tcPr marL="91440" marR="91440" marT="45720" marB="45720" anchor="ctr">
-                    <a:lnL w="6350" cap="flat" cmpd="sng" algn="ctr">
-                      <a:solidFill>
-                        <a:srgbClr val="BFBFBF"/>
-                      </a:solidFill>
-                      <a:prstDash val="solid"/>
-                      <a:round/>
-                      <a:headEnd type="none" w="med" len="med"/>
-                      <a:tailEnd type="none" w="med" len="med"/>
-                    </a:lnL>
-                    <a:lnR w="6350" cap="flat" cmpd="sng" algn="ctr">
-                      <a:solidFill>
-                        <a:srgbClr val="BFBFBF"/>
-                      </a:solidFill>
-                      <a:prstDash val="solid"/>
-                      <a:round/>
-                      <a:headEnd type="none" w="med" len="med"/>
-                      <a:tailEnd type="none" w="med" len="med"/>
-                    </a:lnR>
-                    <a:lnT w="6350" cap="flat" cmpd="sng" algn="ctr">
-                      <a:solidFill>
-                        <a:srgbClr val="BFBFBF"/>
-                      </a:solidFill>
-                      <a:prstDash val="solid"/>
-                      <a:round/>
-                      <a:headEnd type="none" w="med" len="med"/>
-                      <a:tailEnd type="none" w="med" len="med"/>
-                    </a:lnT>
-                    <a:lnB w="6350" cap="flat" cmpd="sng" algn="ctr">
-                      <a:solidFill>
-                        <a:srgbClr val="BFBFBF"/>
-                      </a:solidFill>
-                      <a:prstDash val="solid"/>
-                      <a:round/>
-                      <a:headEnd type="none" w="med" len="med"/>
-                      <a:tailEnd type="none" w="med" len="med"/>
-                    </a:lnB>
-                    <a:solidFill>
-                      <a:srgbClr val="F2F2F2"/>
-                    </a:solidFill>
-                  </a:tcPr>
-                </a:tc>
-              </a:tr>
-              <a:tr h="310896">
-                <a:tc>
-                  <a:txBody>
-                    <a:bodyPr/>
-                    <a:lstStyle/>
-                    <a:p>
-                      <a:pPr algn="l" indent="0" marL="0">
-                        <a:buNone/>
-                      </a:pPr>
-                      <a:r>
-                        <a:rPr lang="en-US" sz="1150" dirty="0">
-                          <a:solidFill>
-                            <a:srgbClr val="000000"/>
-                          </a:solidFill>
-                          <a:latin typeface="Calibri" pitchFamily="34" charset="0"/>
-                          <a:ea typeface="Calibri" pitchFamily="34" charset="-122"/>
-                          <a:cs typeface="Calibri" pitchFamily="34" charset="-120"/>
-                        </a:rPr>
-                        <a:t>BLS for NMTARA 0</a:t>
-                      </a:r>
-                      <a:endParaRPr lang="en-US" sz="1150" dirty="0">
-                        <a:latin typeface="Calibri" charset="0"/>
-                        <a:ea typeface="Calibri" charset="0"/>
-                        <a:cs typeface="Calibri" charset="0"/>
-                      </a:endParaRPr>
-                    </a:p>
-                  </a:txBody>
-                  <a:tcPr marL="91440" marR="91440" marT="45720" marB="45720" anchor="ctr">
-                    <a:lnL w="6350" cap="flat" cmpd="sng" algn="ctr">
-                      <a:solidFill>
-                        <a:srgbClr val="BFBFBF"/>
-                      </a:solidFill>
-                      <a:prstDash val="solid"/>
-                      <a:round/>
-                      <a:headEnd type="none" w="med" len="med"/>
-                      <a:tailEnd type="none" w="med" len="med"/>
-                    </a:lnL>
-                    <a:lnR w="6350" cap="flat" cmpd="sng" algn="ctr">
-                      <a:solidFill>
-                        <a:srgbClr val="BFBFBF"/>
-                      </a:solidFill>
-                      <a:prstDash val="solid"/>
-                      <a:round/>
-                      <a:headEnd type="none" w="med" len="med"/>
-                      <a:tailEnd type="none" w="med" len="med"/>
-                    </a:lnR>
-                    <a:lnT w="6350" cap="flat" cmpd="sng" algn="ctr">
-                      <a:solidFill>
-                        <a:srgbClr val="BFBFBF"/>
-                      </a:solidFill>
-                      <a:prstDash val="solid"/>
-                      <a:round/>
-                      <a:headEnd type="none" w="med" len="med"/>
-                      <a:tailEnd type="none" w="med" len="med"/>
-                    </a:lnT>
-                    <a:lnB w="6350" cap="flat" cmpd="sng" algn="ctr">
-                      <a:solidFill>
-                        <a:srgbClr val="BFBFBF"/>
-                      </a:solidFill>
-                      <a:prstDash val="solid"/>
-                      <a:round/>
-                      <a:headEnd type="none" w="med" len="med"/>
-                      <a:tailEnd type="none" w="med" len="med"/>
-                    </a:lnB>
-                  </a:tcPr>
-                </a:tc>
-                <a:tc>
-                  <a:txBody>
-                    <a:bodyPr/>
-                    <a:lstStyle/>
-                    <a:p>
-                      <a:pPr algn="ctr" indent="0" marL="0">
-                        <a:buNone/>
-                      </a:pPr>
-                      <a:r>
-                        <a:rPr lang="en-US" sz="1150" dirty="0">
-                          <a:solidFill>
-                            <a:srgbClr val="000000"/>
-                          </a:solidFill>
-                          <a:latin typeface="Calibri" pitchFamily="34" charset="0"/>
-                          <a:ea typeface="Calibri" pitchFamily="34" charset="-122"/>
-                          <a:cs typeface="Calibri" pitchFamily="34" charset="-120"/>
-                        </a:rPr>
-                        <a:t>38,343</a:t>
-                      </a:r>
-                      <a:endParaRPr lang="en-US" sz="1150" dirty="0">
-                        <a:latin typeface="Calibri" charset="0"/>
-                        <a:ea typeface="Calibri" charset="0"/>
-                        <a:cs typeface="Calibri" charset="0"/>
-                      </a:endParaRPr>
-                    </a:p>
-                  </a:txBody>
-                  <a:tcPr marL="91440" marR="91440" marT="45720" marB="45720" anchor="ctr">
-                    <a:lnL w="6350" cap="flat" cmpd="sng" algn="ctr">
-                      <a:solidFill>
-                        <a:srgbClr val="BFBFBF"/>
-                      </a:solidFill>
-                      <a:prstDash val="solid"/>
-                      <a:round/>
-                      <a:headEnd type="none" w="med" len="med"/>
-                      <a:tailEnd type="none" w="med" len="med"/>
-                    </a:lnL>
-                    <a:lnR w="6350" cap="flat" cmpd="sng" algn="ctr">
-                      <a:solidFill>
-                        <a:srgbClr val="BFBFBF"/>
-                      </a:solidFill>
-                      <a:prstDash val="solid"/>
-                      <a:round/>
-                      <a:headEnd type="none" w="med" len="med"/>
-                      <a:tailEnd type="none" w="med" len="med"/>
-                    </a:lnR>
-                    <a:lnT w="6350" cap="flat" cmpd="sng" algn="ctr">
-                      <a:solidFill>
-                        <a:srgbClr val="BFBFBF"/>
-                      </a:solidFill>
-                      <a:prstDash val="solid"/>
-                      <a:round/>
-                      <a:headEnd type="none" w="med" len="med"/>
-                      <a:tailEnd type="none" w="med" len="med"/>
-                    </a:lnT>
-                    <a:lnB w="6350" cap="flat" cmpd="sng" algn="ctr">
-                      <a:solidFill>
-                        <a:srgbClr val="BFBFBF"/>
-                      </a:solidFill>
-                      <a:prstDash val="solid"/>
-                      <a:round/>
-                      <a:headEnd type="none" w="med" len="med"/>
-                      <a:tailEnd type="none" w="med" len="med"/>
-                    </a:lnB>
-                  </a:tcPr>
-                </a:tc>
-              </a:tr>
-              <a:tr h="310896">
-                <a:tc>
-                  <a:txBody>
-                    <a:bodyPr/>
-                    <a:lstStyle/>
-                    <a:p>
-                      <a:pPr algn="l" indent="0" marL="0">
-                        <a:buNone/>
-                      </a:pPr>
-                      <a:r>
-                        <a:rPr lang="en-US" sz="1150" dirty="0">
-                          <a:solidFill>
-                            <a:srgbClr val="000000"/>
-                          </a:solidFill>
-                          <a:latin typeface="Calibri" pitchFamily="34" charset="0"/>
-                          <a:ea typeface="Calibri" pitchFamily="34" charset="-122"/>
-                          <a:cs typeface="Calibri" pitchFamily="34" charset="-120"/>
-                        </a:rPr>
-                        <a:t>NN ER</a:t>
-                      </a:r>
-                      <a:endParaRPr lang="en-US" sz="1150" dirty="0">
-                        <a:latin typeface="Calibri" charset="0"/>
-                        <a:ea typeface="Calibri" charset="0"/>
-                        <a:cs typeface="Calibri" charset="0"/>
-                      </a:endParaRPr>
-                    </a:p>
-                  </a:txBody>
-                  <a:tcPr marL="91440" marR="91440" marT="45720" marB="45720" anchor="ctr">
-                    <a:lnL w="6350" cap="flat" cmpd="sng" algn="ctr">
-                      <a:solidFill>
-                        <a:srgbClr val="BFBFBF"/>
-                      </a:solidFill>
-                      <a:prstDash val="solid"/>
-                      <a:round/>
-                      <a:headEnd type="none" w="med" len="med"/>
-                      <a:tailEnd type="none" w="med" len="med"/>
-                    </a:lnL>
-                    <a:lnR w="6350" cap="flat" cmpd="sng" algn="ctr">
-                      <a:solidFill>
-                        <a:srgbClr val="BFBFBF"/>
-                      </a:solidFill>
-                      <a:prstDash val="solid"/>
-                      <a:round/>
-                      <a:headEnd type="none" w="med" len="med"/>
-                      <a:tailEnd type="none" w="med" len="med"/>
-                    </a:lnR>
-                    <a:lnT w="6350" cap="flat" cmpd="sng" algn="ctr">
-                      <a:solidFill>
-                        <a:srgbClr val="BFBFBF"/>
-                      </a:solidFill>
-                      <a:prstDash val="solid"/>
-                      <a:round/>
-                      <a:headEnd type="none" w="med" len="med"/>
-                      <a:tailEnd type="none" w="med" len="med"/>
-                    </a:lnT>
-                    <a:lnB w="6350" cap="flat" cmpd="sng" algn="ctr">
-                      <a:solidFill>
-                        <a:srgbClr val="BFBFBF"/>
-                      </a:solidFill>
-                      <a:prstDash val="solid"/>
-                      <a:round/>
-                      <a:headEnd type="none" w="med" len="med"/>
-                      <a:tailEnd type="none" w="med" len="med"/>
-                    </a:lnB>
-                  </a:tcPr>
-                </a:tc>
-                <a:tc>
-                  <a:txBody>
-                    <a:bodyPr/>
-                    <a:lstStyle/>
-                    <a:p>
-                      <a:pPr algn="ctr" indent="0" marL="0">
-                        <a:buNone/>
-                      </a:pPr>
-                      <a:r>
-                        <a:rPr lang="en-US" sz="1150" dirty="0">
-                          <a:solidFill>
-                            <a:srgbClr val="000000"/>
-                          </a:solidFill>
-                          <a:latin typeface="Calibri" pitchFamily="34" charset="0"/>
-                          <a:ea typeface="Calibri" pitchFamily="34" charset="-122"/>
-                          <a:cs typeface="Calibri" pitchFamily="34" charset="-120"/>
-                        </a:rPr>
-                        <a:t>18,428</a:t>
-                      </a:r>
-                      <a:endParaRPr lang="en-US" sz="1150" dirty="0">
-                        <a:latin typeface="Calibri" charset="0"/>
-                        <a:ea typeface="Calibri" charset="0"/>
-                        <a:cs typeface="Calibri" charset="0"/>
-                      </a:endParaRPr>
-                    </a:p>
-                  </a:txBody>
-                  <a:tcPr marL="91440" marR="91440" marT="45720" marB="45720" anchor="ctr">
-                    <a:lnL w="6350" cap="flat" cmpd="sng" algn="ctr">
-                      <a:solidFill>
-                        <a:srgbClr val="BFBFBF"/>
-                      </a:solidFill>
-                      <a:prstDash val="solid"/>
-                      <a:round/>
-                      <a:headEnd type="none" w="med" len="med"/>
-                      <a:tailEnd type="none" w="med" len="med"/>
-                    </a:lnL>
-                    <a:lnR w="6350" cap="flat" cmpd="sng" algn="ctr">
-                      <a:solidFill>
-                        <a:srgbClr val="BFBFBF"/>
-                      </a:solidFill>
-                      <a:prstDash val="solid"/>
-                      <a:round/>
-                      <a:headEnd type="none" w="med" len="med"/>
-                      <a:tailEnd type="none" w="med" len="med"/>
-                    </a:lnR>
-                    <a:lnT w="6350" cap="flat" cmpd="sng" algn="ctr">
-                      <a:solidFill>
-                        <a:srgbClr val="BFBFBF"/>
-                      </a:solidFill>
-                      <a:prstDash val="solid"/>
-                      <a:round/>
-                      <a:headEnd type="none" w="med" len="med"/>
-                      <a:tailEnd type="none" w="med" len="med"/>
-                    </a:lnT>
-                    <a:lnB w="6350" cap="flat" cmpd="sng" algn="ctr">
-                      <a:solidFill>
-                        <a:srgbClr val="BFBFBF"/>
-                      </a:solidFill>
-                      <a:prstDash val="solid"/>
-                      <a:round/>
-                      <a:headEnd type="none" w="med" len="med"/>
-                      <a:tailEnd type="none" w="med" len="med"/>
-                    </a:lnB>
-                  </a:tcPr>
-                </a:tc>
-              </a:tr>
-              <a:tr h="310896">
-                <a:tc>
-                  <a:txBody>
-                    <a:bodyPr/>
-                    <a:lstStyle/>
-                    <a:p>
-                      <a:pPr algn="l" indent="0" marL="0">
-                        <a:buNone/>
-                      </a:pPr>
-                      <a:r>
-                        <a:rPr lang="en-US" sz="1150" dirty="0">
-                          <a:solidFill>
-                            <a:srgbClr val="000000"/>
-                          </a:solidFill>
-                          <a:latin typeface="Calibri" pitchFamily="34" charset="0"/>
-                          <a:ea typeface="Calibri" pitchFamily="34" charset="-122"/>
-                          <a:cs typeface="Calibri" pitchFamily="34" charset="-120"/>
-                        </a:rPr>
-                        <a:t>REF CCR</a:t>
-                      </a:r>
-                      <a:endParaRPr lang="en-US" sz="1150" dirty="0">
-                        <a:latin typeface="Calibri" charset="0"/>
-                        <a:ea typeface="Calibri" charset="0"/>
-                        <a:cs typeface="Calibri" charset="0"/>
-                      </a:endParaRPr>
-                    </a:p>
-                  </a:txBody>
-                  <a:tcPr marL="91440" marR="91440" marT="45720" marB="45720" anchor="ctr">
-                    <a:lnL w="6350" cap="flat" cmpd="sng" algn="ctr">
-                      <a:solidFill>
-                        <a:srgbClr val="BFBFBF"/>
-                      </a:solidFill>
-                      <a:prstDash val="solid"/>
-                      <a:round/>
-                      <a:headEnd type="none" w="med" len="med"/>
-                      <a:tailEnd type="none" w="med" len="med"/>
-                    </a:lnL>
-                    <a:lnR w="6350" cap="flat" cmpd="sng" algn="ctr">
-                      <a:solidFill>
-                        <a:srgbClr val="BFBFBF"/>
-                      </a:solidFill>
-                      <a:prstDash val="solid"/>
-                      <a:round/>
-                      <a:headEnd type="none" w="med" len="med"/>
-                      <a:tailEnd type="none" w="med" len="med"/>
-                    </a:lnR>
-                    <a:lnT w="6350" cap="flat" cmpd="sng" algn="ctr">
-                      <a:solidFill>
-                        <a:srgbClr val="BFBFBF"/>
-                      </a:solidFill>
-                      <a:prstDash val="solid"/>
-                      <a:round/>
-                      <a:headEnd type="none" w="med" len="med"/>
-                      <a:tailEnd type="none" w="med" len="med"/>
-                    </a:lnT>
-                    <a:lnB w="6350" cap="flat" cmpd="sng" algn="ctr">
-                      <a:solidFill>
-                        <a:srgbClr val="BFBFBF"/>
-                      </a:solidFill>
-                      <a:prstDash val="solid"/>
-                      <a:round/>
-                      <a:headEnd type="none" w="med" len="med"/>
-                      <a:tailEnd type="none" w="med" len="med"/>
-                    </a:lnB>
-                  </a:tcPr>
-                </a:tc>
-                <a:tc>
-                  <a:txBody>
-                    <a:bodyPr/>
-                    <a:lstStyle/>
-                    <a:p>
-                      <a:pPr algn="ctr" indent="0" marL="0">
-                        <a:buNone/>
-                      </a:pPr>
-                      <a:r>
-                        <a:rPr lang="en-US" sz="1150" dirty="0">
-                          <a:solidFill>
-                            <a:srgbClr val="000000"/>
-                          </a:solidFill>
-                          <a:latin typeface="Calibri" pitchFamily="34" charset="0"/>
-                          <a:ea typeface="Calibri" pitchFamily="34" charset="-122"/>
-                          <a:cs typeface="Calibri" pitchFamily="34" charset="-120"/>
-                        </a:rPr>
-                        <a:t>7,855</a:t>
-                      </a:r>
-                      <a:endParaRPr lang="en-US" sz="1150" dirty="0">
-                        <a:latin typeface="Calibri" charset="0"/>
-                        <a:ea typeface="Calibri" charset="0"/>
-                        <a:cs typeface="Calibri" charset="0"/>
-                      </a:endParaRPr>
-                    </a:p>
-                  </a:txBody>
-                  <a:tcPr marL="91440" marR="91440" marT="45720" marB="45720" anchor="ctr">
-                    <a:lnL w="6350" cap="flat" cmpd="sng" algn="ctr">
-                      <a:solidFill>
-                        <a:srgbClr val="BFBFBF"/>
-                      </a:solidFill>
-                      <a:prstDash val="solid"/>
-                      <a:round/>
-                      <a:headEnd type="none" w="med" len="med"/>
-                      <a:tailEnd type="none" w="med" len="med"/>
-                    </a:lnL>
-                    <a:lnR w="6350" cap="flat" cmpd="sng" algn="ctr">
-                      <a:solidFill>
-                        <a:srgbClr val="BFBFBF"/>
-                      </a:solidFill>
-                      <a:prstDash val="solid"/>
-                      <a:round/>
-                      <a:headEnd type="none" w="med" len="med"/>
-                      <a:tailEnd type="none" w="med" len="med"/>
-                    </a:lnR>
-                    <a:lnT w="6350" cap="flat" cmpd="sng" algn="ctr">
-                      <a:solidFill>
-                        <a:srgbClr val="BFBFBF"/>
-                      </a:solidFill>
-                      <a:prstDash val="solid"/>
-                      <a:round/>
-                      <a:headEnd type="none" w="med" len="med"/>
-                      <a:tailEnd type="none" w="med" len="med"/>
-                    </a:lnT>
-                    <a:lnB w="6350" cap="flat" cmpd="sng" algn="ctr">
-                      <a:solidFill>
-                        <a:srgbClr val="BFBFBF"/>
-                      </a:solidFill>
-                      <a:prstDash val="solid"/>
-                      <a:round/>
-                      <a:headEnd type="none" w="med" len="med"/>
-                      <a:tailEnd type="none" w="med" len="med"/>
-                    </a:lnB>
-                  </a:tcPr>
-                </a:tc>
-              </a:tr>
-              <a:tr h="310896">
-                <a:tc>
-                  <a:txBody>
-                    <a:bodyPr/>
-                    <a:lstStyle/>
-                    <a:p>
-                      <a:pPr algn="l" indent="0" marL="0">
-                        <a:buNone/>
-                      </a:pPr>
-                      <a:r>
-                        <a:rPr lang="en-US" sz="1150" dirty="0">
-                          <a:solidFill>
-                            <a:srgbClr val="000000"/>
-                          </a:solidFill>
-                          <a:latin typeface="Calibri" pitchFamily="34" charset="0"/>
-                          <a:ea typeface="Calibri" pitchFamily="34" charset="-122"/>
-                          <a:cs typeface="Calibri" pitchFamily="34" charset="-120"/>
-                        </a:rPr>
-                        <a:t>VIRTUAL CARE</a:t>
-                      </a:r>
-                      <a:endParaRPr lang="en-US" sz="1150" dirty="0">
-                        <a:latin typeface="Calibri" charset="0"/>
-                        <a:ea typeface="Calibri" charset="0"/>
-                        <a:cs typeface="Calibri" charset="0"/>
-                      </a:endParaRPr>
-                    </a:p>
-                  </a:txBody>
-                  <a:tcPr marL="91440" marR="91440" marT="45720" marB="45720" anchor="ctr">
-                    <a:lnL w="6350" cap="flat" cmpd="sng" algn="ctr">
-                      <a:solidFill>
-                        <a:srgbClr val="BFBFBF"/>
-                      </a:solidFill>
-                      <a:prstDash val="solid"/>
-                      <a:round/>
-                      <a:headEnd type="none" w="med" len="med"/>
-                      <a:tailEnd type="none" w="med" len="med"/>
-                    </a:lnL>
-                    <a:lnR w="6350" cap="flat" cmpd="sng" algn="ctr">
-                      <a:solidFill>
-                        <a:srgbClr val="BFBFBF"/>
-                      </a:solidFill>
-                      <a:prstDash val="solid"/>
-                      <a:round/>
-                      <a:headEnd type="none" w="med" len="med"/>
-                      <a:tailEnd type="none" w="med" len="med"/>
-                    </a:lnR>
-                    <a:lnT w="6350" cap="flat" cmpd="sng" algn="ctr">
-                      <a:solidFill>
-                        <a:srgbClr val="BFBFBF"/>
-                      </a:solidFill>
-                      <a:prstDash val="solid"/>
-                      <a:round/>
-                      <a:headEnd type="none" w="med" len="med"/>
-                      <a:tailEnd type="none" w="med" len="med"/>
-                    </a:lnT>
-                    <a:lnB w="6350" cap="flat" cmpd="sng" algn="ctr">
-                      <a:solidFill>
-                        <a:srgbClr val="BFBFBF"/>
-                      </a:solidFill>
-                      <a:prstDash val="solid"/>
-                      <a:round/>
-                      <a:headEnd type="none" w="med" len="med"/>
-                      <a:tailEnd type="none" w="med" len="med"/>
-                    </a:lnB>
-                  </a:tcPr>
-                </a:tc>
-                <a:tc>
-                  <a:txBody>
-                    <a:bodyPr/>
-                    <a:lstStyle/>
-                    <a:p>
-                      <a:pPr algn="ctr" indent="0" marL="0">
-                        <a:buNone/>
-                      </a:pPr>
-                      <a:r>
-                        <a:rPr lang="en-US" sz="1150" dirty="0">
-                          <a:solidFill>
-                            <a:srgbClr val="000000"/>
-                          </a:solidFill>
-                          <a:latin typeface="Calibri" pitchFamily="34" charset="0"/>
-                          <a:ea typeface="Calibri" pitchFamily="34" charset="-122"/>
-                          <a:cs typeface="Calibri" pitchFamily="34" charset="-120"/>
-                        </a:rPr>
-                        <a:t>5,782</a:t>
-                      </a:r>
-                      <a:endParaRPr lang="en-US" sz="1150" dirty="0">
-                        <a:latin typeface="Calibri" charset="0"/>
-                        <a:ea typeface="Calibri" charset="0"/>
-                        <a:cs typeface="Calibri" charset="0"/>
-                      </a:endParaRPr>
-                    </a:p>
-                  </a:txBody>
-                  <a:tcPr marL="91440" marR="91440" marT="45720" marB="45720" anchor="ctr">
-                    <a:lnL w="6350" cap="flat" cmpd="sng" algn="ctr">
-                      <a:solidFill>
-                        <a:srgbClr val="BFBFBF"/>
-                      </a:solidFill>
-                      <a:prstDash val="solid"/>
-                      <a:round/>
-                      <a:headEnd type="none" w="med" len="med"/>
-                      <a:tailEnd type="none" w="med" len="med"/>
-                    </a:lnL>
-                    <a:lnR w="6350" cap="flat" cmpd="sng" algn="ctr">
-                      <a:solidFill>
-                        <a:srgbClr val="BFBFBF"/>
-                      </a:solidFill>
-                      <a:prstDash val="solid"/>
-                      <a:round/>
-                      <a:headEnd type="none" w="med" len="med"/>
-                      <a:tailEnd type="none" w="med" len="med"/>
-                    </a:lnR>
-                    <a:lnT w="6350" cap="flat" cmpd="sng" algn="ctr">
-                      <a:solidFill>
-                        <a:srgbClr val="BFBFBF"/>
-                      </a:solidFill>
-                      <a:prstDash val="solid"/>
-                      <a:round/>
-                      <a:headEnd type="none" w="med" len="med"/>
-                      <a:tailEnd type="none" w="med" len="med"/>
-                    </a:lnT>
-                    <a:lnB w="6350" cap="flat" cmpd="sng" algn="ctr">
-                      <a:solidFill>
-                        <a:srgbClr val="BFBFBF"/>
-                      </a:solidFill>
-                      <a:prstDash val="solid"/>
-                      <a:round/>
-                      <a:headEnd type="none" w="med" len="med"/>
-                      <a:tailEnd type="none" w="med" len="med"/>
-                    </a:lnB>
-                  </a:tcPr>
-                </a:tc>
-              </a:tr>
-              <a:tr h="310896">
-                <a:tc>
-                  <a:txBody>
-                    <a:bodyPr/>
-                    <a:lstStyle/>
-                    <a:p>
-                      <a:pPr algn="l" indent="0" marL="0">
-                        <a:buNone/>
-                      </a:pPr>
-                      <a:r>
-                        <a:rPr lang="en-US" sz="1150" dirty="0">
-                          <a:solidFill>
-                            <a:srgbClr val="000000"/>
-                          </a:solidFill>
-                          <a:latin typeface="Calibri" pitchFamily="34" charset="0"/>
-                          <a:ea typeface="Calibri" pitchFamily="34" charset="-122"/>
-                          <a:cs typeface="Calibri" pitchFamily="34" charset="-120"/>
-                        </a:rPr>
-                        <a:t>ALS</a:t>
-                      </a:r>
-                      <a:endParaRPr lang="en-US" sz="1150" dirty="0">
-                        <a:latin typeface="Calibri" charset="0"/>
-                        <a:ea typeface="Calibri" charset="0"/>
-                        <a:cs typeface="Calibri" charset="0"/>
-                      </a:endParaRPr>
-                    </a:p>
-                  </a:txBody>
-                  <a:tcPr marL="91440" marR="91440" marT="45720" marB="45720" anchor="ctr">
-                    <a:lnL w="6350" cap="flat" cmpd="sng" algn="ctr">
-                      <a:solidFill>
-                        <a:srgbClr val="BFBFBF"/>
-                      </a:solidFill>
-                      <a:prstDash val="solid"/>
-                      <a:round/>
-                      <a:headEnd type="none" w="med" len="med"/>
-                      <a:tailEnd type="none" w="med" len="med"/>
-                    </a:lnL>
-                    <a:lnR w="6350" cap="flat" cmpd="sng" algn="ctr">
-                      <a:solidFill>
-                        <a:srgbClr val="BFBFBF"/>
-                      </a:solidFill>
-                      <a:prstDash val="solid"/>
-                      <a:round/>
-                      <a:headEnd type="none" w="med" len="med"/>
-                      <a:tailEnd type="none" w="med" len="med"/>
-                    </a:lnR>
-                    <a:lnT w="6350" cap="flat" cmpd="sng" algn="ctr">
-                      <a:solidFill>
-                        <a:srgbClr val="BFBFBF"/>
-                      </a:solidFill>
-                      <a:prstDash val="solid"/>
-                      <a:round/>
-                      <a:headEnd type="none" w="med" len="med"/>
-                      <a:tailEnd type="none" w="med" len="med"/>
-                    </a:lnT>
-                    <a:lnB w="6350" cap="flat" cmpd="sng" algn="ctr">
-                      <a:solidFill>
-                        <a:srgbClr val="BFBFBF"/>
-                      </a:solidFill>
-                      <a:prstDash val="solid"/>
-                      <a:round/>
-                      <a:headEnd type="none" w="med" len="med"/>
-                      <a:tailEnd type="none" w="med" len="med"/>
-                    </a:lnB>
-                  </a:tcPr>
-                </a:tc>
-                <a:tc>
-                  <a:txBody>
-                    <a:bodyPr/>
-                    <a:lstStyle/>
-                    <a:p>
-                      <a:pPr algn="ctr" indent="0" marL="0">
-                        <a:buNone/>
-                      </a:pPr>
-                      <a:r>
-                        <a:rPr lang="en-US" sz="1150" dirty="0">
-                          <a:solidFill>
-                            <a:srgbClr val="000000"/>
-                          </a:solidFill>
-                          <a:latin typeface="Calibri" pitchFamily="34" charset="0"/>
-                          <a:ea typeface="Calibri" pitchFamily="34" charset="-122"/>
-                          <a:cs typeface="Calibri" pitchFamily="34" charset="-120"/>
-                        </a:rPr>
-                        <a:t>5,657</a:t>
-                      </a:r>
-                      <a:endParaRPr lang="en-US" sz="1150" dirty="0">
-                        <a:latin typeface="Calibri" charset="0"/>
-                        <a:ea typeface="Calibri" charset="0"/>
-                        <a:cs typeface="Calibri" charset="0"/>
-                      </a:endParaRPr>
-                    </a:p>
-                  </a:txBody>
-                  <a:tcPr marL="91440" marR="91440" marT="45720" marB="45720" anchor="ctr">
-                    <a:lnL w="6350" cap="flat" cmpd="sng" algn="ctr">
-                      <a:solidFill>
-                        <a:srgbClr val="BFBFBF"/>
-                      </a:solidFill>
-                      <a:prstDash val="solid"/>
-                      <a:round/>
-                      <a:headEnd type="none" w="med" len="med"/>
-                      <a:tailEnd type="none" w="med" len="med"/>
-                    </a:lnL>
-                    <a:lnR w="6350" cap="flat" cmpd="sng" algn="ctr">
-                      <a:solidFill>
-                        <a:srgbClr val="BFBFBF"/>
-                      </a:solidFill>
-                      <a:prstDash val="solid"/>
-                      <a:round/>
-                      <a:headEnd type="none" w="med" len="med"/>
-                      <a:tailEnd type="none" w="med" len="med"/>
-                    </a:lnR>
-                    <a:lnT w="6350" cap="flat" cmpd="sng" algn="ctr">
-                      <a:solidFill>
-                        <a:srgbClr val="BFBFBF"/>
-                      </a:solidFill>
-                      <a:prstDash val="solid"/>
-                      <a:round/>
-                      <a:headEnd type="none" w="med" len="med"/>
-                      <a:tailEnd type="none" w="med" len="med"/>
-                    </a:lnT>
-                    <a:lnB w="6350" cap="flat" cmpd="sng" algn="ctr">
-                      <a:solidFill>
-                        <a:srgbClr val="BFBFBF"/>
-                      </a:solidFill>
-                      <a:prstDash val="solid"/>
-                      <a:round/>
-                      <a:headEnd type="none" w="med" len="med"/>
-                      <a:tailEnd type="none" w="med" len="med"/>
-                    </a:lnB>
-                  </a:tcPr>
-                </a:tc>
-              </a:tr>
-              <a:tr h="310896">
-                <a:tc>
-                  <a:txBody>
-                    <a:bodyPr/>
-                    <a:lstStyle/>
-                    <a:p>
-                      <a:pPr algn="l" indent="0" marL="0">
-                        <a:buNone/>
-                      </a:pPr>
-                      <a:r>
-                        <a:rPr lang="en-US" sz="1150" dirty="0">
-                          <a:solidFill>
-                            <a:srgbClr val="000000"/>
-                          </a:solidFill>
-                          <a:latin typeface="Calibri" pitchFamily="34" charset="0"/>
-                          <a:ea typeface="Calibri" pitchFamily="34" charset="-122"/>
-                          <a:cs typeface="Calibri" pitchFamily="34" charset="-120"/>
-                        </a:rPr>
-                        <a:t>BLS without NMTARA</a:t>
-                      </a:r>
-                      <a:endParaRPr lang="en-US" sz="1150" dirty="0">
-                        <a:latin typeface="Calibri" charset="0"/>
-                        <a:ea typeface="Calibri" charset="0"/>
-                        <a:cs typeface="Calibri" charset="0"/>
-                      </a:endParaRPr>
-                    </a:p>
-                  </a:txBody>
-                  <a:tcPr marL="91440" marR="91440" marT="45720" marB="45720" anchor="ctr">
-                    <a:lnL w="6350" cap="flat" cmpd="sng" algn="ctr">
-                      <a:solidFill>
-                        <a:srgbClr val="BFBFBF"/>
-                      </a:solidFill>
-                      <a:prstDash val="solid"/>
-                      <a:round/>
-                      <a:headEnd type="none" w="med" len="med"/>
-                      <a:tailEnd type="none" w="med" len="med"/>
-                    </a:lnL>
-                    <a:lnR w="6350" cap="flat" cmpd="sng" algn="ctr">
-                      <a:solidFill>
-                        <a:srgbClr val="BFBFBF"/>
-                      </a:solidFill>
-                      <a:prstDash val="solid"/>
-                      <a:round/>
-                      <a:headEnd type="none" w="med" len="med"/>
-                      <a:tailEnd type="none" w="med" len="med"/>
-                    </a:lnR>
-                    <a:lnT w="6350" cap="flat" cmpd="sng" algn="ctr">
-                      <a:solidFill>
-                        <a:srgbClr val="BFBFBF"/>
-                      </a:solidFill>
-                      <a:prstDash val="solid"/>
-                      <a:round/>
-                      <a:headEnd type="none" w="med" len="med"/>
-                      <a:tailEnd type="none" w="med" len="med"/>
-                    </a:lnT>
-                    <a:lnB w="6350" cap="flat" cmpd="sng" algn="ctr">
-                      <a:solidFill>
-                        <a:srgbClr val="BFBFBF"/>
-                      </a:solidFill>
-                      <a:prstDash val="solid"/>
-                      <a:round/>
-                      <a:headEnd type="none" w="med" len="med"/>
-                      <a:tailEnd type="none" w="med" len="med"/>
-                    </a:lnB>
-                  </a:tcPr>
-                </a:tc>
-                <a:tc>
-                  <a:txBody>
-                    <a:bodyPr/>
-                    <a:lstStyle/>
-                    <a:p>
-                      <a:pPr algn="ctr" indent="0" marL="0">
-                        <a:buNone/>
-                      </a:pPr>
-                      <a:r>
-                        <a:rPr lang="en-US" sz="1150" dirty="0">
-                          <a:solidFill>
-                            <a:srgbClr val="000000"/>
-                          </a:solidFill>
-                          <a:latin typeface="Calibri" pitchFamily="34" charset="0"/>
-                          <a:ea typeface="Calibri" pitchFamily="34" charset="-122"/>
-                          <a:cs typeface="Calibri" pitchFamily="34" charset="-120"/>
-                        </a:rPr>
-                        <a:t>1,747</a:t>
-                      </a:r>
-                      <a:endParaRPr lang="en-US" sz="1150" dirty="0">
-                        <a:latin typeface="Calibri" charset="0"/>
-                        <a:ea typeface="Calibri" charset="0"/>
-                        <a:cs typeface="Calibri" charset="0"/>
-                      </a:endParaRPr>
-                    </a:p>
-                  </a:txBody>
-                  <a:tcPr marL="91440" marR="91440" marT="45720" marB="45720" anchor="ctr">
-                    <a:lnL w="6350" cap="flat" cmpd="sng" algn="ctr">
-                      <a:solidFill>
-                        <a:srgbClr val="BFBFBF"/>
-                      </a:solidFill>
-                      <a:prstDash val="solid"/>
-                      <a:round/>
-                      <a:headEnd type="none" w="med" len="med"/>
-                      <a:tailEnd type="none" w="med" len="med"/>
-                    </a:lnL>
-                    <a:lnR w="6350" cap="flat" cmpd="sng" algn="ctr">
-                      <a:solidFill>
-                        <a:srgbClr val="BFBFBF"/>
-                      </a:solidFill>
-                      <a:prstDash val="solid"/>
-                      <a:round/>
-                      <a:headEnd type="none" w="med" len="med"/>
-                      <a:tailEnd type="none" w="med" len="med"/>
-                    </a:lnR>
-                    <a:lnT w="6350" cap="flat" cmpd="sng" algn="ctr">
-                      <a:solidFill>
-                        <a:srgbClr val="BFBFBF"/>
-                      </a:solidFill>
-                      <a:prstDash val="solid"/>
-                      <a:round/>
-                      <a:headEnd type="none" w="med" len="med"/>
-                      <a:tailEnd type="none" w="med" len="med"/>
-                    </a:lnT>
-                    <a:lnB w="6350" cap="flat" cmpd="sng" algn="ctr">
-                      <a:solidFill>
-                        <a:srgbClr val="BFBFBF"/>
-                      </a:solidFill>
-                      <a:prstDash val="solid"/>
-                      <a:round/>
-                      <a:headEnd type="none" w="med" len="med"/>
-                      <a:tailEnd type="none" w="med" len="med"/>
-                    </a:lnB>
-                  </a:tcPr>
-                </a:tc>
-              </a:tr>
-              <a:tr h="310896">
-                <a:tc>
-                  <a:txBody>
-                    <a:bodyPr/>
-                    <a:lstStyle/>
-                    <a:p>
-                      <a:pPr algn="l" indent="0" marL="0">
-                        <a:buNone/>
-                      </a:pPr>
-                      <a:r>
-                        <a:rPr lang="en-US" sz="1150" dirty="0">
-                          <a:solidFill>
-                            <a:srgbClr val="000000"/>
-                          </a:solidFill>
-                          <a:latin typeface="Calibri" pitchFamily="34" charset="0"/>
-                          <a:ea typeface="Calibri" pitchFamily="34" charset="-122"/>
-                          <a:cs typeface="Calibri" pitchFamily="34" charset="-120"/>
-                        </a:rPr>
-                        <a:t>All remaining</a:t>
-                      </a:r>
-                      <a:endParaRPr lang="en-US" sz="1150" dirty="0">
-                        <a:latin typeface="Calibri" charset="0"/>
-                        <a:ea typeface="Calibri" charset="0"/>
-                        <a:cs typeface="Calibri" charset="0"/>
-                      </a:endParaRPr>
-                    </a:p>
-                  </a:txBody>
-                  <a:tcPr marL="91440" marR="91440" marT="45720" marB="45720" anchor="ctr">
-                    <a:lnL w="6350" cap="flat" cmpd="sng" algn="ctr">
-                      <a:solidFill>
-                        <a:srgbClr val="BFBFBF"/>
-                      </a:solidFill>
-                      <a:prstDash val="solid"/>
-                      <a:round/>
-                      <a:headEnd type="none" w="med" len="med"/>
-                      <a:tailEnd type="none" w="med" len="med"/>
-                    </a:lnL>
-                    <a:lnR w="6350" cap="flat" cmpd="sng" algn="ctr">
-                      <a:solidFill>
-                        <a:srgbClr val="BFBFBF"/>
-                      </a:solidFill>
-                      <a:prstDash val="solid"/>
-                      <a:round/>
-                      <a:headEnd type="none" w="med" len="med"/>
-                      <a:tailEnd type="none" w="med" len="med"/>
-                    </a:lnR>
-                    <a:lnT w="6350" cap="flat" cmpd="sng" algn="ctr">
-                      <a:solidFill>
-                        <a:srgbClr val="BFBFBF"/>
-                      </a:solidFill>
-                      <a:prstDash val="solid"/>
-                      <a:round/>
-                      <a:headEnd type="none" w="med" len="med"/>
-                      <a:tailEnd type="none" w="med" len="med"/>
-                    </a:lnT>
-                    <a:lnB w="6350" cap="flat" cmpd="sng" algn="ctr">
-                      <a:solidFill>
-                        <a:srgbClr val="BFBFBF"/>
-                      </a:solidFill>
-                      <a:prstDash val="solid"/>
-                      <a:round/>
-                      <a:headEnd type="none" w="med" len="med"/>
-                      <a:tailEnd type="none" w="med" len="med"/>
-                    </a:lnB>
-                  </a:tcPr>
-                </a:tc>
-                <a:tc>
-                  <a:txBody>
-                    <a:bodyPr/>
-                    <a:lstStyle/>
-                    <a:p>
-                      <a:pPr algn="ctr" indent="0" marL="0">
-                        <a:buNone/>
-                      </a:pPr>
-                      <a:r>
-                        <a:rPr lang="en-US" sz="1150" dirty="0">
-                          <a:solidFill>
-                            <a:srgbClr val="000000"/>
-                          </a:solidFill>
-                          <a:latin typeface="Calibri" pitchFamily="34" charset="0"/>
-                          <a:ea typeface="Calibri" pitchFamily="34" charset="-122"/>
-                          <a:cs typeface="Calibri" pitchFamily="34" charset="-120"/>
-                        </a:rPr>
-                        <a:t>1,859</a:t>
-                      </a:r>
-                      <a:endParaRPr lang="en-US" sz="1150" dirty="0">
-                        <a:latin typeface="Calibri" charset="0"/>
-                        <a:ea typeface="Calibri" charset="0"/>
-                        <a:cs typeface="Calibri" charset="0"/>
-                      </a:endParaRPr>
-                    </a:p>
-                  </a:txBody>
-                  <a:tcPr marL="91440" marR="91440" marT="45720" marB="45720" anchor="ctr">
-                    <a:lnL w="6350" cap="flat" cmpd="sng" algn="ctr">
-                      <a:solidFill>
-                        <a:srgbClr val="BFBFBF"/>
-                      </a:solidFill>
-                      <a:prstDash val="solid"/>
-                      <a:round/>
-                      <a:headEnd type="none" w="med" len="med"/>
-                      <a:tailEnd type="none" w="med" len="med"/>
-                    </a:lnL>
-                    <a:lnR w="6350" cap="flat" cmpd="sng" algn="ctr">
-                      <a:solidFill>
-                        <a:srgbClr val="BFBFBF"/>
-                      </a:solidFill>
-                      <a:prstDash val="solid"/>
-                      <a:round/>
-                      <a:headEnd type="none" w="med" len="med"/>
-                      <a:tailEnd type="none" w="med" len="med"/>
-                    </a:lnR>
-                    <a:lnT w="6350" cap="flat" cmpd="sng" algn="ctr">
-                      <a:solidFill>
-                        <a:srgbClr val="BFBFBF"/>
-                      </a:solidFill>
-                      <a:prstDash val="solid"/>
-                      <a:round/>
-                      <a:headEnd type="none" w="med" len="med"/>
-                      <a:tailEnd type="none" w="med" len="med"/>
-                    </a:lnT>
-                    <a:lnB w="6350" cap="flat" cmpd="sng" algn="ctr">
-                      <a:solidFill>
-                        <a:srgbClr val="BFBFBF"/>
-                      </a:solidFill>
-                      <a:prstDash val="solid"/>
-                      <a:round/>
-                      <a:headEnd type="none" w="med" len="med"/>
-                      <a:tailEnd type="none" w="med" len="med"/>
-                    </a:lnB>
-                  </a:tcPr>
-                </a:tc>
-              </a:tr>
-            </a:tbl>
-          </a:graphicData>
-        </a:graphic>
-      </p:graphicFrame>
+      <p:pic>
+        <p:nvPicPr>
+          <p:cNvPr id="4" name="Image 0" descr="/home/claude/charts/sc_complaint.png">    </p:cNvPr>
+          <p:cNvPicPr>
+            <a:picLocks noChangeAspect="1"/>
+          </p:cNvPicPr>
+          <p:nvPr/>
+        </p:nvPicPr>
+        <p:blipFill>
+          <a:blip r:embed="rId1"/>
+          <a:stretch>
+            <a:fillRect/>
+          </a:stretch>
+        </p:blipFill>
+        <p:spPr>
+          <a:xfrm>
+            <a:off x="411480" y="1234440"/>
+            <a:ext cx="6583680" cy="3657600"/>
+          </a:xfrm>
+          <a:prstGeom prst="rect">
+            <a:avLst/>
+          </a:prstGeom>
+        </p:spPr>
+      </p:pic>
       <p:sp>
         <p:nvSpPr>
           <p:cNvPr id="5" name="Text 2"/>
@@ -6845,8 +7701,8 @@
         </p:nvSpPr>
         <p:spPr>
           <a:xfrm>
-            <a:off x="5486400" y="1371600"/>
-            <a:ext cx="6217920" cy="4572000"/>
+            <a:off x="7223760" y="1371600"/>
+            <a:ext cx="4480560" cy="4572000"/>
           </a:xfrm>
           <a:prstGeom prst="rect">
             <a:avLst/>
@@ -6868,15 +7724,15 @@
               <a:buNone/>
             </a:pPr>
             <a:r>
-              <a:rPr lang="en-US" sz="1300" b="1" dirty="0">
-                <a:solidFill>
-                  <a:srgbClr val="000000"/>
-                </a:solidFill>
-                <a:latin typeface="Calibri" pitchFamily="34" charset="0"/>
-                <a:ea typeface="Calibri" pitchFamily="34" charset="-122"/>
-                <a:cs typeface="Calibri" pitchFamily="34" charset="-120"/>
-              </a:rPr>
-              <a:t>79,671 calls sit in one category. </a:t>
+              <a:rPr lang="en-US" sz="1200" b="1" dirty="0">
+                <a:solidFill>
+                  <a:srgbClr val="000000"/>
+                </a:solidFill>
+                <a:latin typeface="Calibri" pitchFamily="34" charset="0"/>
+                <a:ea typeface="Calibri" pitchFamily="34" charset="-122"/>
+                <a:cs typeface="Calibri" pitchFamily="34" charset="-120"/>
+              </a:rPr>
+              <a:t>The largest single group is calls where triage was not completed (3,343), which end in self-care by default rather than by clinical decision. </a:t>
             </a:r>
             <a:pPr indent="0" marL="0">
               <a:lnSpc>
@@ -6888,17 +7744,17 @@
               <a:buNone/>
             </a:pPr>
             <a:r>
-              <a:rPr lang="en-US" sz="1300" dirty="0">
-                <a:solidFill>
-                  <a:srgbClr val="000000"/>
-                </a:solidFill>
-                <a:latin typeface="Calibri" pitchFamily="34" charset="0"/>
-                <a:ea typeface="Calibri" pitchFamily="34" charset="-122"/>
-                <a:cs typeface="Calibri" pitchFamily="34" charset="-120"/>
-              </a:rPr>
-              <a:t>It mixes emergency transports, ER referrals, and virtual care under a single label. The largest single label inside it is BLS for NMTARA 0 at 38,343 calls, followed by NN ER at 18,428.</a:t>
-            </a:r>
-            <a:endParaRPr lang="en-US" sz="1300" dirty="0"/>
+              <a:rPr lang="en-US" sz="1200" dirty="0">
+                <a:solidFill>
+                  <a:srgbClr val="000000"/>
+                </a:solidFill>
+                <a:latin typeface="Calibri" pitchFamily="34" charset="0"/>
+                <a:ea typeface="Calibri" pitchFamily="34" charset="-122"/>
+                <a:cs typeface="Calibri" pitchFamily="34" charset="-120"/>
+              </a:rPr>
+              <a:t>Among clinical complaints, abdominal pain (1,012), anxiety (930), hypertension (892), and vomiting (717) lead. Diabetes and dizziness follow.</a:t>
+            </a:r>
+            <a:endParaRPr lang="en-US" sz="1200" dirty="0"/>
           </a:p>
         </p:txBody>
       </p:sp>
@@ -6910,8 +7766,8 @@
         </p:nvSpPr>
         <p:spPr>
           <a:xfrm>
-            <a:off x="5486400" y="3108960"/>
-            <a:ext cx="6217920" cy="4572000"/>
+            <a:off x="7223760" y="3474720"/>
+            <a:ext cx="4480560" cy="4572000"/>
           </a:xfrm>
           <a:prstGeom prst="rect">
             <a:avLst/>
@@ -6933,15 +7789,15 @@
               <a:buNone/>
             </a:pPr>
             <a:r>
-              <a:rPr lang="en-US" sz="1300" dirty="0">
-                <a:solidFill>
-                  <a:srgbClr val="000000"/>
-                </a:solidFill>
-                <a:latin typeface="Calibri" pitchFamily="34" charset="0"/>
-                <a:ea typeface="Calibri" pitchFamily="34" charset="-122"/>
-                <a:cs typeface="Calibri" pitchFamily="34" charset="-120"/>
-              </a:rPr>
-              <a:t>While these calls sit together, diversion potential, cost, and clinical pattern cannot be measured for the group. </a:t>
+              <a:rPr lang="en-US" sz="1200" dirty="0">
+                <a:solidFill>
+                  <a:srgbClr val="000000"/>
+                </a:solidFill>
+                <a:latin typeface="Calibri" pitchFamily="34" charset="0"/>
+                <a:ea typeface="Calibri" pitchFamily="34" charset="-122"/>
+                <a:cs typeface="Calibri" pitchFamily="34" charset="-120"/>
+              </a:rPr>
+              <a:t>These are largely chronic or lower-acuity conditions. </a:t>
             </a:r>
             <a:pPr indent="0" marL="0">
               <a:lnSpc>
@@ -6953,17 +7809,17 @@
               <a:buNone/>
             </a:pPr>
             <a:r>
-              <a:rPr lang="en-US" sz="1300" dirty="0">
-                <a:solidFill>
-                  <a:srgbClr val="000000"/>
-                </a:solidFill>
-                <a:latin typeface="Calibri" pitchFamily="34" charset="0"/>
-                <a:ea typeface="Calibri" pitchFamily="34" charset="-122"/>
-                <a:cs typeface="Calibri" pitchFamily="34" charset="-120"/>
-              </a:rPr>
-              <a:t>Separating it into component outcomes is required before it can be read.</a:t>
-            </a:r>
-            <a:endParaRPr lang="en-US" sz="1300" dirty="0"/>
+              <a:rPr lang="en-US" sz="1200" dirty="0">
+                <a:solidFill>
+                  <a:srgbClr val="000000"/>
+                </a:solidFill>
+                <a:latin typeface="Calibri" pitchFamily="34" charset="0"/>
+                <a:ea typeface="Calibri" pitchFamily="34" charset="-122"/>
+                <a:cs typeface="Calibri" pitchFamily="34" charset="-120"/>
+              </a:rPr>
+              <a:t>This is the condition mix that a new operating system would need to re-categorize, since “self-care” today does not distinguish them.</a:t>
+            </a:r>
+            <a:endParaRPr lang="en-US" sz="1200" dirty="0"/>
           </a:p>
         </p:txBody>
       </p:sp>
@@ -7043,7 +7899,7 @@
                 <a:ea typeface="Calibri" pitchFamily="34" charset="-122"/>
                 <a:cs typeface="Calibri" pitchFamily="34" charset="-120"/>
               </a:rPr>
-              <a:t>Source: the code map’s residual group - every disposition that is not self-care, not an override, and not NMTARA 6 falls to Other. Population: all 150,003 calls; 79,671 land here. Label counts come from Transaction Response Names within this group.</a:t>
+              <a:t>Source: the Cause field on the 25,174 self-care calls. Grouped by chief complaint and counted; share = each complaint’s count / 25,174. Full population, code-based, no note reading. Blank causes shown as “Not stated.”</a:t>
             </a:r>
             <a:endParaRPr lang="en-US" sz="1050" dirty="0"/>
           </a:p>
